--- a/取扱説明書.pptx
+++ b/取扱説明書.pptx
@@ -3066,7 +3066,7 @@
                 <a:ea typeface="Meiryo" pitchFamily="34" charset="-122"/>
                 <a:cs typeface="Meiryo" pitchFamily="34" charset="-120"/>
               </a:rPr>
-              <a:t>名前がタイムライン名に。保存先に作業フォルダができる</a:t>
+              <a:t>毎回「名前\日付_時刻」の新しいフォルダができる（前のは消えない）</a:t>
             </a:r>
             <a:endParaRPr lang="en-US" sz="1200" dirty="0"/>
           </a:p>
@@ -6175,7 +6175,7 @@
                 <a:ea typeface="Meiryo" pitchFamily="34" charset="-122"/>
                 <a:cs typeface="Meiryo" pitchFamily="34" charset="-120"/>
               </a:rPr>
-              <a:t>誤字がないか。直すときは台本を直して再スタート</a:t>
+              <a:t>誤字があれば、テロップをクリック → インスペクタの「テキスト」で直接直す</a:t>
             </a:r>
             <a:endParaRPr lang="en-US" sz="1250" dirty="0"/>
           </a:p>
@@ -6280,7 +6280,7 @@
                 <a:ea typeface="Meiryo" pitchFamily="34" charset="-122"/>
                 <a:cs typeface="Meiryo" pitchFamily="34" charset="-120"/>
               </a:rPr>
-              <a:t>テロップの周り</a:t>
+              <a:t>前のタイムライン</a:t>
             </a:r>
             <a:endParaRPr lang="en-US" sz="1600" dirty="0"/>
           </a:p>
@@ -6319,7 +6319,7 @@
                 <a:ea typeface="Meiryo" pitchFamily="34" charset="-122"/>
                 <a:cs typeface="Meiryo" pitchFamily="34" charset="-120"/>
               </a:rPr>
-              <a:t>黒くなっていたら：クリップを右クリック → クリップ属性 → アルファモード「ストレート」</a:t>
+              <a:t>やり直しても前のタイムライン・素材は消えない。見比べて良い方を使う</a:t>
             </a:r>
             <a:endParaRPr lang="en-US" sz="1250" dirty="0"/>
           </a:p>
@@ -6677,7 +6677,7 @@
                 <a:ea typeface="Meiryo" pitchFamily="34" charset="-122"/>
                 <a:cs typeface="Meiryo" pitchFamily="34" charset="-120"/>
               </a:rPr>
-              <a:t>テロップの見本（白文字・黒縁・上から4分の1）</a:t>
+              <a:t>テロップの見本（見た目はひな形しだい）</a:t>
             </a:r>
             <a:endParaRPr lang="en-US" sz="1050" dirty="0"/>
           </a:p>
@@ -6748,7 +6748,7 @@
                 <a:ea typeface="Meiryo" pitchFamily="34" charset="-122"/>
                 <a:cs typeface="Meiryo" pitchFamily="34" charset="-120"/>
               </a:rPr>
-              <a:t>テロップの見た目を変える</a:t>
+              <a:t>テロップのひな形を作る（最初に1回）</a:t>
             </a:r>
             <a:endParaRPr lang="en-US" sz="3000" dirty="0"/>
           </a:p>
@@ -6787,1453 +6787,34 @@
                 <a:ea typeface="Meiryo" pitchFamily="34" charset="-122"/>
                 <a:cs typeface="Meiryo" pitchFamily="34" charset="-120"/>
               </a:rPr>
-              <a:t>フォルダの config.json をメモ帳で開いて数字を変え、保存します</a:t>
+              <a:t>テロップは Resolve の Text+ で置かれ、見た目はこの「ひな形」のとおりになります</a:t>
             </a:r>
             <a:endParaRPr lang="en-US" sz="1400" dirty="0"/>
           </a:p>
         </p:txBody>
       </p:sp>
-      <p:graphicFrame>
-        <p:nvGraphicFramePr>
-          <p:cNvPr id="15" name="Table 0"/>
-          <p:cNvGraphicFramePr>
-            <a:graphicFrameLocks noGrp="1"/>
-          </p:cNvGraphicFramePr>
-          <p:nvPr>
-            <p:extLst>
-              <p:ext uri="{D42A27DB-BD31-4B8C-83A1-F6EECF244321}">
-                <p14:modId xmlns:p14="http://schemas.microsoft.com/office/powerpoint/2010/main" val="1579011935"/>
-              </p:ext>
-            </p:extLst>
-          </p:nvPr>
-        </p:nvGraphicFramePr>
-        <p:xfrm>
-          <a:off x="548640" y="1645920"/>
-          <a:ext cx="6766560" cy="914400"/>
-        </p:xfrm>
-        <a:graphic>
-          <a:graphicData uri="http://schemas.openxmlformats.org/drawingml/2006/table">
-            <a:tbl>
-              <a:tblPr/>
-              <a:tblGrid>
-                <a:gridCol w="2377440"/>
-                <a:gridCol w="2743200"/>
-                <a:gridCol w="1645920"/>
-              </a:tblGrid>
-              <a:tr h="475488">
-                <a:tc>
-                  <a:txBody>
-                    <a:bodyPr/>
-                    <a:lstStyle/>
-                    <a:p>
-                      <a:pPr indent="0" marL="0">
-                        <a:buNone/>
-                      </a:pPr>
-                      <a:r>
-                        <a:rPr lang="en-US" sz="1300" b="1" dirty="0">
-                          <a:solidFill>
-                            <a:srgbClr val="FFFFFF"/>
-                          </a:solidFill>
-                          <a:latin typeface="Meiryo" pitchFamily="34" charset="0"/>
-                          <a:ea typeface="Meiryo" pitchFamily="34" charset="-122"/>
-                          <a:cs typeface="Meiryo" pitchFamily="34" charset="-120"/>
-                        </a:rPr>
-                        <a:t>項目</a:t>
-                      </a:r>
-                      <a:endParaRPr lang="en-US" sz="1300" dirty="0">
-                        <a:latin typeface="Meiryo" charset="0"/>
-                        <a:ea typeface="Meiryo" charset="0"/>
-                        <a:cs typeface="Meiryo" charset="0"/>
-                      </a:endParaRPr>
-                    </a:p>
-                  </a:txBody>
-                  <a:tcPr marL="91440" marR="91440" marT="45720" marB="45720">
-                    <a:lnL w="12700" cap="flat" cmpd="sng" algn="ctr">
-                      <a:solidFill>
-                        <a:srgbClr val="D5DAE3"/>
-                      </a:solidFill>
-                      <a:prstDash val="solid"/>
-                      <a:round/>
-                      <a:headEnd type="none" w="med" len="med"/>
-                      <a:tailEnd type="none" w="med" len="med"/>
-                    </a:lnL>
-                    <a:lnR w="12700" cap="flat" cmpd="sng" algn="ctr">
-                      <a:solidFill>
-                        <a:srgbClr val="D5DAE3"/>
-                      </a:solidFill>
-                      <a:prstDash val="solid"/>
-                      <a:round/>
-                      <a:headEnd type="none" w="med" len="med"/>
-                      <a:tailEnd type="none" w="med" len="med"/>
-                    </a:lnR>
-                    <a:lnT w="12700" cap="flat" cmpd="sng" algn="ctr">
-                      <a:solidFill>
-                        <a:srgbClr val="D5DAE3"/>
-                      </a:solidFill>
-                      <a:prstDash val="solid"/>
-                      <a:round/>
-                      <a:headEnd type="none" w="med" len="med"/>
-                      <a:tailEnd type="none" w="med" len="med"/>
-                    </a:lnT>
-                    <a:lnB w="12700" cap="flat" cmpd="sng" algn="ctr">
-                      <a:solidFill>
-                        <a:srgbClr val="D5DAE3"/>
-                      </a:solidFill>
-                      <a:prstDash val="solid"/>
-                      <a:round/>
-                      <a:headEnd type="none" w="med" len="med"/>
-                      <a:tailEnd type="none" w="med" len="med"/>
-                    </a:lnB>
-                    <a:solidFill>
-                      <a:srgbClr val="161B26"/>
-                    </a:solidFill>
-                  </a:tcPr>
-                </a:tc>
-                <a:tc>
-                  <a:txBody>
-                    <a:bodyPr/>
-                    <a:lstStyle/>
-                    <a:p>
-                      <a:pPr indent="0" marL="0">
-                        <a:buNone/>
-                      </a:pPr>
-                      <a:r>
-                        <a:rPr lang="en-US" sz="1300" b="1" dirty="0">
-                          <a:solidFill>
-                            <a:srgbClr val="FFFFFF"/>
-                          </a:solidFill>
-                          <a:latin typeface="Meiryo" pitchFamily="34" charset="0"/>
-                          <a:ea typeface="Meiryo" pitchFamily="34" charset="-122"/>
-                          <a:cs typeface="Meiryo" pitchFamily="34" charset="-120"/>
-                        </a:rPr>
-                        <a:t>意味</a:t>
-                      </a:r>
-                      <a:endParaRPr lang="en-US" sz="1300" dirty="0">
-                        <a:latin typeface="Meiryo" charset="0"/>
-                        <a:ea typeface="Meiryo" charset="0"/>
-                        <a:cs typeface="Meiryo" charset="0"/>
-                      </a:endParaRPr>
-                    </a:p>
-                  </a:txBody>
-                  <a:tcPr marL="91440" marR="91440" marT="45720" marB="45720">
-                    <a:lnL w="12700" cap="flat" cmpd="sng" algn="ctr">
-                      <a:solidFill>
-                        <a:srgbClr val="D5DAE3"/>
-                      </a:solidFill>
-                      <a:prstDash val="solid"/>
-                      <a:round/>
-                      <a:headEnd type="none" w="med" len="med"/>
-                      <a:tailEnd type="none" w="med" len="med"/>
-                    </a:lnL>
-                    <a:lnR w="12700" cap="flat" cmpd="sng" algn="ctr">
-                      <a:solidFill>
-                        <a:srgbClr val="D5DAE3"/>
-                      </a:solidFill>
-                      <a:prstDash val="solid"/>
-                      <a:round/>
-                      <a:headEnd type="none" w="med" len="med"/>
-                      <a:tailEnd type="none" w="med" len="med"/>
-                    </a:lnR>
-                    <a:lnT w="12700" cap="flat" cmpd="sng" algn="ctr">
-                      <a:solidFill>
-                        <a:srgbClr val="D5DAE3"/>
-                      </a:solidFill>
-                      <a:prstDash val="solid"/>
-                      <a:round/>
-                      <a:headEnd type="none" w="med" len="med"/>
-                      <a:tailEnd type="none" w="med" len="med"/>
-                    </a:lnT>
-                    <a:lnB w="12700" cap="flat" cmpd="sng" algn="ctr">
-                      <a:solidFill>
-                        <a:srgbClr val="D5DAE3"/>
-                      </a:solidFill>
-                      <a:prstDash val="solid"/>
-                      <a:round/>
-                      <a:headEnd type="none" w="med" len="med"/>
-                      <a:tailEnd type="none" w="med" len="med"/>
-                    </a:lnB>
-                    <a:solidFill>
-                      <a:srgbClr val="161B26"/>
-                    </a:solidFill>
-                  </a:tcPr>
-                </a:tc>
-                <a:tc>
-                  <a:txBody>
-                    <a:bodyPr/>
-                    <a:lstStyle/>
-                    <a:p>
-                      <a:pPr indent="0" marL="0">
-                        <a:buNone/>
-                      </a:pPr>
-                      <a:r>
-                        <a:rPr lang="en-US" sz="1300" b="1" dirty="0">
-                          <a:solidFill>
-                            <a:srgbClr val="FFFFFF"/>
-                          </a:solidFill>
-                          <a:latin typeface="Meiryo" pitchFamily="34" charset="0"/>
-                          <a:ea typeface="Meiryo" pitchFamily="34" charset="-122"/>
-                          <a:cs typeface="Meiryo" pitchFamily="34" charset="-120"/>
-                        </a:rPr>
-                        <a:t>最初の値</a:t>
-                      </a:r>
-                      <a:endParaRPr lang="en-US" sz="1300" dirty="0">
-                        <a:latin typeface="Meiryo" charset="0"/>
-                        <a:ea typeface="Meiryo" charset="0"/>
-                        <a:cs typeface="Meiryo" charset="0"/>
-                      </a:endParaRPr>
-                    </a:p>
-                  </a:txBody>
-                  <a:tcPr marL="91440" marR="91440" marT="45720" marB="45720">
-                    <a:lnL w="12700" cap="flat" cmpd="sng" algn="ctr">
-                      <a:solidFill>
-                        <a:srgbClr val="D5DAE3"/>
-                      </a:solidFill>
-                      <a:prstDash val="solid"/>
-                      <a:round/>
-                      <a:headEnd type="none" w="med" len="med"/>
-                      <a:tailEnd type="none" w="med" len="med"/>
-                    </a:lnL>
-                    <a:lnR w="12700" cap="flat" cmpd="sng" algn="ctr">
-                      <a:solidFill>
-                        <a:srgbClr val="D5DAE3"/>
-                      </a:solidFill>
-                      <a:prstDash val="solid"/>
-                      <a:round/>
-                      <a:headEnd type="none" w="med" len="med"/>
-                      <a:tailEnd type="none" w="med" len="med"/>
-                    </a:lnR>
-                    <a:lnT w="12700" cap="flat" cmpd="sng" algn="ctr">
-                      <a:solidFill>
-                        <a:srgbClr val="D5DAE3"/>
-                      </a:solidFill>
-                      <a:prstDash val="solid"/>
-                      <a:round/>
-                      <a:headEnd type="none" w="med" len="med"/>
-                      <a:tailEnd type="none" w="med" len="med"/>
-                    </a:lnT>
-                    <a:lnB w="12700" cap="flat" cmpd="sng" algn="ctr">
-                      <a:solidFill>
-                        <a:srgbClr val="D5DAE3"/>
-                      </a:solidFill>
-                      <a:prstDash val="solid"/>
-                      <a:round/>
-                      <a:headEnd type="none" w="med" len="med"/>
-                      <a:tailEnd type="none" w="med" len="med"/>
-                    </a:lnB>
-                    <a:solidFill>
-                      <a:srgbClr val="161B26"/>
-                    </a:solidFill>
-                  </a:tcPr>
-                </a:tc>
-              </a:tr>
-              <a:tr h="475488">
-                <a:tc>
-                  <a:txBody>
-                    <a:bodyPr/>
-                    <a:lstStyle/>
-                    <a:p>
-                      <a:pPr indent="0" marL="0">
-                        <a:buNone/>
-                      </a:pPr>
-                      <a:r>
-                        <a:rPr lang="en-US" sz="1250" b="1" dirty="0">
-                          <a:solidFill>
-                            <a:srgbClr val="1F2937"/>
-                          </a:solidFill>
-                          <a:latin typeface="Consolas" pitchFamily="34" charset="0"/>
-                          <a:ea typeface="Consolas" pitchFamily="34" charset="-122"/>
-                          <a:cs typeface="Consolas" pitchFamily="34" charset="-120"/>
-                        </a:rPr>
-                        <a:t>telop_size</a:t>
-                      </a:r>
-                      <a:endParaRPr lang="en-US" sz="1250" dirty="0">
-                        <a:latin typeface="Consolas" charset="0"/>
-                        <a:ea typeface="Consolas" charset="0"/>
-                        <a:cs typeface="Consolas" charset="0"/>
-                      </a:endParaRPr>
-                    </a:p>
-                  </a:txBody>
-                  <a:tcPr marL="91440" marR="91440" marT="45720" marB="45720">
-                    <a:lnL w="12700" cap="flat" cmpd="sng" algn="ctr">
-                      <a:solidFill>
-                        <a:srgbClr val="D5DAE3"/>
-                      </a:solidFill>
-                      <a:prstDash val="solid"/>
-                      <a:round/>
-                      <a:headEnd type="none" w="med" len="med"/>
-                      <a:tailEnd type="none" w="med" len="med"/>
-                    </a:lnL>
-                    <a:lnR w="12700" cap="flat" cmpd="sng" algn="ctr">
-                      <a:solidFill>
-                        <a:srgbClr val="D5DAE3"/>
-                      </a:solidFill>
-                      <a:prstDash val="solid"/>
-                      <a:round/>
-                      <a:headEnd type="none" w="med" len="med"/>
-                      <a:tailEnd type="none" w="med" len="med"/>
-                    </a:lnR>
-                    <a:lnT w="12700" cap="flat" cmpd="sng" algn="ctr">
-                      <a:solidFill>
-                        <a:srgbClr val="D5DAE3"/>
-                      </a:solidFill>
-                      <a:prstDash val="solid"/>
-                      <a:round/>
-                      <a:headEnd type="none" w="med" len="med"/>
-                      <a:tailEnd type="none" w="med" len="med"/>
-                    </a:lnT>
-                    <a:lnB w="12700" cap="flat" cmpd="sng" algn="ctr">
-                      <a:solidFill>
-                        <a:srgbClr val="D5DAE3"/>
-                      </a:solidFill>
-                      <a:prstDash val="solid"/>
-                      <a:round/>
-                      <a:headEnd type="none" w="med" len="med"/>
-                      <a:tailEnd type="none" w="med" len="med"/>
-                    </a:lnB>
-                  </a:tcPr>
-                </a:tc>
-                <a:tc>
-                  <a:txBody>
-                    <a:bodyPr/>
-                    <a:lstStyle/>
-                    <a:p>
-                      <a:pPr indent="0" marL="0">
-                        <a:buNone/>
-                      </a:pPr>
-                      <a:r>
-                        <a:rPr lang="en-US" sz="1250" dirty="0">
-                          <a:solidFill>
-                            <a:srgbClr val="1F2937"/>
-                          </a:solidFill>
-                          <a:latin typeface="Meiryo" pitchFamily="34" charset="0"/>
-                          <a:ea typeface="Meiryo" pitchFamily="34" charset="-122"/>
-                          <a:cs typeface="Meiryo" pitchFamily="34" charset="-120"/>
-                        </a:rPr>
-                        <a:t>文字の大きさ</a:t>
-                      </a:r>
-                      <a:endParaRPr lang="en-US" sz="1250" dirty="0">
-                        <a:latin typeface="Meiryo" charset="0"/>
-                        <a:ea typeface="Meiryo" charset="0"/>
-                        <a:cs typeface="Meiryo" charset="0"/>
-                      </a:endParaRPr>
-                    </a:p>
-                  </a:txBody>
-                  <a:tcPr marL="91440" marR="91440" marT="45720" marB="45720">
-                    <a:lnL w="12700" cap="flat" cmpd="sng" algn="ctr">
-                      <a:solidFill>
-                        <a:srgbClr val="D5DAE3"/>
-                      </a:solidFill>
-                      <a:prstDash val="solid"/>
-                      <a:round/>
-                      <a:headEnd type="none" w="med" len="med"/>
-                      <a:tailEnd type="none" w="med" len="med"/>
-                    </a:lnL>
-                    <a:lnR w="12700" cap="flat" cmpd="sng" algn="ctr">
-                      <a:solidFill>
-                        <a:srgbClr val="D5DAE3"/>
-                      </a:solidFill>
-                      <a:prstDash val="solid"/>
-                      <a:round/>
-                      <a:headEnd type="none" w="med" len="med"/>
-                      <a:tailEnd type="none" w="med" len="med"/>
-                    </a:lnR>
-                    <a:lnT w="12700" cap="flat" cmpd="sng" algn="ctr">
-                      <a:solidFill>
-                        <a:srgbClr val="D5DAE3"/>
-                      </a:solidFill>
-                      <a:prstDash val="solid"/>
-                      <a:round/>
-                      <a:headEnd type="none" w="med" len="med"/>
-                      <a:tailEnd type="none" w="med" len="med"/>
-                    </a:lnT>
-                    <a:lnB w="12700" cap="flat" cmpd="sng" algn="ctr">
-                      <a:solidFill>
-                        <a:srgbClr val="D5DAE3"/>
-                      </a:solidFill>
-                      <a:prstDash val="solid"/>
-                      <a:round/>
-                      <a:headEnd type="none" w="med" len="med"/>
-                      <a:tailEnd type="none" w="med" len="med"/>
-                    </a:lnB>
-                  </a:tcPr>
-                </a:tc>
-                <a:tc>
-                  <a:txBody>
-                    <a:bodyPr/>
-                    <a:lstStyle/>
-                    <a:p>
-                      <a:pPr indent="0" marL="0">
-                        <a:buNone/>
-                      </a:pPr>
-                      <a:r>
-                        <a:rPr lang="en-US" sz="1250" dirty="0">
-                          <a:solidFill>
-                            <a:srgbClr val="1F2937"/>
-                          </a:solidFill>
-                          <a:latin typeface="Meiryo" pitchFamily="34" charset="0"/>
-                          <a:ea typeface="Meiryo" pitchFamily="34" charset="-122"/>
-                          <a:cs typeface="Meiryo" pitchFamily="34" charset="-120"/>
-                        </a:rPr>
-                        <a:t>80</a:t>
-                      </a:r>
-                      <a:endParaRPr lang="en-US" sz="1250" dirty="0">
-                        <a:latin typeface="Meiryo" charset="0"/>
-                        <a:ea typeface="Meiryo" charset="0"/>
-                        <a:cs typeface="Meiryo" charset="0"/>
-                      </a:endParaRPr>
-                    </a:p>
-                  </a:txBody>
-                  <a:tcPr marL="91440" marR="91440" marT="45720" marB="45720">
-                    <a:lnL w="12700" cap="flat" cmpd="sng" algn="ctr">
-                      <a:solidFill>
-                        <a:srgbClr val="D5DAE3"/>
-                      </a:solidFill>
-                      <a:prstDash val="solid"/>
-                      <a:round/>
-                      <a:headEnd type="none" w="med" len="med"/>
-                      <a:tailEnd type="none" w="med" len="med"/>
-                    </a:lnL>
-                    <a:lnR w="12700" cap="flat" cmpd="sng" algn="ctr">
-                      <a:solidFill>
-                        <a:srgbClr val="D5DAE3"/>
-                      </a:solidFill>
-                      <a:prstDash val="solid"/>
-                      <a:round/>
-                      <a:headEnd type="none" w="med" len="med"/>
-                      <a:tailEnd type="none" w="med" len="med"/>
-                    </a:lnR>
-                    <a:lnT w="12700" cap="flat" cmpd="sng" algn="ctr">
-                      <a:solidFill>
-                        <a:srgbClr val="D5DAE3"/>
-                      </a:solidFill>
-                      <a:prstDash val="solid"/>
-                      <a:round/>
-                      <a:headEnd type="none" w="med" len="med"/>
-                      <a:tailEnd type="none" w="med" len="med"/>
-                    </a:lnT>
-                    <a:lnB w="12700" cap="flat" cmpd="sng" algn="ctr">
-                      <a:solidFill>
-                        <a:srgbClr val="D5DAE3"/>
-                      </a:solidFill>
-                      <a:prstDash val="solid"/>
-                      <a:round/>
-                      <a:headEnd type="none" w="med" len="med"/>
-                      <a:tailEnd type="none" w="med" len="med"/>
-                    </a:lnB>
-                  </a:tcPr>
-                </a:tc>
-              </a:tr>
-              <a:tr h="475488">
-                <a:tc>
-                  <a:txBody>
-                    <a:bodyPr/>
-                    <a:lstStyle/>
-                    <a:p>
-                      <a:pPr indent="0" marL="0">
-                        <a:buNone/>
-                      </a:pPr>
-                      <a:r>
-                        <a:rPr lang="en-US" sz="1250" b="1" dirty="0">
-                          <a:solidFill>
-                            <a:srgbClr val="1F2937"/>
-                          </a:solidFill>
-                          <a:latin typeface="Consolas" pitchFamily="34" charset="0"/>
-                          <a:ea typeface="Consolas" pitchFamily="34" charset="-122"/>
-                          <a:cs typeface="Consolas" pitchFamily="34" charset="-120"/>
-                        </a:rPr>
-                        <a:t>telop_y</a:t>
-                      </a:r>
-                      <a:endParaRPr lang="en-US" sz="1250" dirty="0">
-                        <a:latin typeface="Consolas" charset="0"/>
-                        <a:ea typeface="Consolas" charset="0"/>
-                        <a:cs typeface="Consolas" charset="0"/>
-                      </a:endParaRPr>
-                    </a:p>
-                  </a:txBody>
-                  <a:tcPr marL="91440" marR="91440" marT="45720" marB="45720">
-                    <a:lnL w="12700" cap="flat" cmpd="sng" algn="ctr">
-                      <a:solidFill>
-                        <a:srgbClr val="D5DAE3"/>
-                      </a:solidFill>
-                      <a:prstDash val="solid"/>
-                      <a:round/>
-                      <a:headEnd type="none" w="med" len="med"/>
-                      <a:tailEnd type="none" w="med" len="med"/>
-                    </a:lnL>
-                    <a:lnR w="12700" cap="flat" cmpd="sng" algn="ctr">
-                      <a:solidFill>
-                        <a:srgbClr val="D5DAE3"/>
-                      </a:solidFill>
-                      <a:prstDash val="solid"/>
-                      <a:round/>
-                      <a:headEnd type="none" w="med" len="med"/>
-                      <a:tailEnd type="none" w="med" len="med"/>
-                    </a:lnR>
-                    <a:lnT w="12700" cap="flat" cmpd="sng" algn="ctr">
-                      <a:solidFill>
-                        <a:srgbClr val="D5DAE3"/>
-                      </a:solidFill>
-                      <a:prstDash val="solid"/>
-                      <a:round/>
-                      <a:headEnd type="none" w="med" len="med"/>
-                      <a:tailEnd type="none" w="med" len="med"/>
-                    </a:lnT>
-                    <a:lnB w="12700" cap="flat" cmpd="sng" algn="ctr">
-                      <a:solidFill>
-                        <a:srgbClr val="D5DAE3"/>
-                      </a:solidFill>
-                      <a:prstDash val="solid"/>
-                      <a:round/>
-                      <a:headEnd type="none" w="med" len="med"/>
-                      <a:tailEnd type="none" w="med" len="med"/>
-                    </a:lnB>
-                  </a:tcPr>
-                </a:tc>
-                <a:tc>
-                  <a:txBody>
-                    <a:bodyPr/>
-                    <a:lstStyle/>
-                    <a:p>
-                      <a:pPr indent="0" marL="0">
-                        <a:buNone/>
-                      </a:pPr>
-                      <a:r>
-                        <a:rPr lang="en-US" sz="1250" dirty="0">
-                          <a:solidFill>
-                            <a:srgbClr val="1F2937"/>
-                          </a:solidFill>
-                          <a:latin typeface="Meiryo" pitchFamily="34" charset="0"/>
-                          <a:ea typeface="Meiryo" pitchFamily="34" charset="-122"/>
-                          <a:cs typeface="Meiryo" pitchFamily="34" charset="-120"/>
-                        </a:rPr>
-                        <a:t>縦の位置（上 0 〜 下 1）</a:t>
-                      </a:r>
-                      <a:endParaRPr lang="en-US" sz="1250" dirty="0">
-                        <a:latin typeface="Meiryo" charset="0"/>
-                        <a:ea typeface="Meiryo" charset="0"/>
-                        <a:cs typeface="Meiryo" charset="0"/>
-                      </a:endParaRPr>
-                    </a:p>
-                  </a:txBody>
-                  <a:tcPr marL="91440" marR="91440" marT="45720" marB="45720">
-                    <a:lnL w="12700" cap="flat" cmpd="sng" algn="ctr">
-                      <a:solidFill>
-                        <a:srgbClr val="D5DAE3"/>
-                      </a:solidFill>
-                      <a:prstDash val="solid"/>
-                      <a:round/>
-                      <a:headEnd type="none" w="med" len="med"/>
-                      <a:tailEnd type="none" w="med" len="med"/>
-                    </a:lnL>
-                    <a:lnR w="12700" cap="flat" cmpd="sng" algn="ctr">
-                      <a:solidFill>
-                        <a:srgbClr val="D5DAE3"/>
-                      </a:solidFill>
-                      <a:prstDash val="solid"/>
-                      <a:round/>
-                      <a:headEnd type="none" w="med" len="med"/>
-                      <a:tailEnd type="none" w="med" len="med"/>
-                    </a:lnR>
-                    <a:lnT w="12700" cap="flat" cmpd="sng" algn="ctr">
-                      <a:solidFill>
-                        <a:srgbClr val="D5DAE3"/>
-                      </a:solidFill>
-                      <a:prstDash val="solid"/>
-                      <a:round/>
-                      <a:headEnd type="none" w="med" len="med"/>
-                      <a:tailEnd type="none" w="med" len="med"/>
-                    </a:lnT>
-                    <a:lnB w="12700" cap="flat" cmpd="sng" algn="ctr">
-                      <a:solidFill>
-                        <a:srgbClr val="D5DAE3"/>
-                      </a:solidFill>
-                      <a:prstDash val="solid"/>
-                      <a:round/>
-                      <a:headEnd type="none" w="med" len="med"/>
-                      <a:tailEnd type="none" w="med" len="med"/>
-                    </a:lnB>
-                  </a:tcPr>
-                </a:tc>
-                <a:tc>
-                  <a:txBody>
-                    <a:bodyPr/>
-                    <a:lstStyle/>
-                    <a:p>
-                      <a:pPr indent="0" marL="0">
-                        <a:buNone/>
-                      </a:pPr>
-                      <a:r>
-                        <a:rPr lang="en-US" sz="1250" dirty="0">
-                          <a:solidFill>
-                            <a:srgbClr val="1F2937"/>
-                          </a:solidFill>
-                          <a:latin typeface="Meiryo" pitchFamily="34" charset="0"/>
-                          <a:ea typeface="Meiryo" pitchFamily="34" charset="-122"/>
-                          <a:cs typeface="Meiryo" pitchFamily="34" charset="-120"/>
-                        </a:rPr>
-                        <a:t>0.25</a:t>
-                      </a:r>
-                      <a:endParaRPr lang="en-US" sz="1250" dirty="0">
-                        <a:latin typeface="Meiryo" charset="0"/>
-                        <a:ea typeface="Meiryo" charset="0"/>
-                        <a:cs typeface="Meiryo" charset="0"/>
-                      </a:endParaRPr>
-                    </a:p>
-                  </a:txBody>
-                  <a:tcPr marL="91440" marR="91440" marT="45720" marB="45720">
-                    <a:lnL w="12700" cap="flat" cmpd="sng" algn="ctr">
-                      <a:solidFill>
-                        <a:srgbClr val="D5DAE3"/>
-                      </a:solidFill>
-                      <a:prstDash val="solid"/>
-                      <a:round/>
-                      <a:headEnd type="none" w="med" len="med"/>
-                      <a:tailEnd type="none" w="med" len="med"/>
-                    </a:lnL>
-                    <a:lnR w="12700" cap="flat" cmpd="sng" algn="ctr">
-                      <a:solidFill>
-                        <a:srgbClr val="D5DAE3"/>
-                      </a:solidFill>
-                      <a:prstDash val="solid"/>
-                      <a:round/>
-                      <a:headEnd type="none" w="med" len="med"/>
-                      <a:tailEnd type="none" w="med" len="med"/>
-                    </a:lnR>
-                    <a:lnT w="12700" cap="flat" cmpd="sng" algn="ctr">
-                      <a:solidFill>
-                        <a:srgbClr val="D5DAE3"/>
-                      </a:solidFill>
-                      <a:prstDash val="solid"/>
-                      <a:round/>
-                      <a:headEnd type="none" w="med" len="med"/>
-                      <a:tailEnd type="none" w="med" len="med"/>
-                    </a:lnT>
-                    <a:lnB w="12700" cap="flat" cmpd="sng" algn="ctr">
-                      <a:solidFill>
-                        <a:srgbClr val="D5DAE3"/>
-                      </a:solidFill>
-                      <a:prstDash val="solid"/>
-                      <a:round/>
-                      <a:headEnd type="none" w="med" len="med"/>
-                      <a:tailEnd type="none" w="med" len="med"/>
-                    </a:lnB>
-                  </a:tcPr>
-                </a:tc>
-              </a:tr>
-              <a:tr h="475488">
-                <a:tc>
-                  <a:txBody>
-                    <a:bodyPr/>
-                    <a:lstStyle/>
-                    <a:p>
-                      <a:pPr indent="0" marL="0">
-                        <a:buNone/>
-                      </a:pPr>
-                      <a:r>
-                        <a:rPr lang="en-US" sz="1250" b="1" dirty="0">
-                          <a:solidFill>
-                            <a:srgbClr val="1F2937"/>
-                          </a:solidFill>
-                          <a:latin typeface="Consolas" pitchFamily="34" charset="0"/>
-                          <a:ea typeface="Consolas" pitchFamily="34" charset="-122"/>
-                          <a:cs typeface="Consolas" pitchFamily="34" charset="-120"/>
-                        </a:rPr>
-                        <a:t>telop_color</a:t>
-                      </a:r>
-                      <a:endParaRPr lang="en-US" sz="1250" dirty="0">
-                        <a:latin typeface="Consolas" charset="0"/>
-                        <a:ea typeface="Consolas" charset="0"/>
-                        <a:cs typeface="Consolas" charset="0"/>
-                      </a:endParaRPr>
-                    </a:p>
-                  </a:txBody>
-                  <a:tcPr marL="91440" marR="91440" marT="45720" marB="45720">
-                    <a:lnL w="12700" cap="flat" cmpd="sng" algn="ctr">
-                      <a:solidFill>
-                        <a:srgbClr val="D5DAE3"/>
-                      </a:solidFill>
-                      <a:prstDash val="solid"/>
-                      <a:round/>
-                      <a:headEnd type="none" w="med" len="med"/>
-                      <a:tailEnd type="none" w="med" len="med"/>
-                    </a:lnL>
-                    <a:lnR w="12700" cap="flat" cmpd="sng" algn="ctr">
-                      <a:solidFill>
-                        <a:srgbClr val="D5DAE3"/>
-                      </a:solidFill>
-                      <a:prstDash val="solid"/>
-                      <a:round/>
-                      <a:headEnd type="none" w="med" len="med"/>
-                      <a:tailEnd type="none" w="med" len="med"/>
-                    </a:lnR>
-                    <a:lnT w="12700" cap="flat" cmpd="sng" algn="ctr">
-                      <a:solidFill>
-                        <a:srgbClr val="D5DAE3"/>
-                      </a:solidFill>
-                      <a:prstDash val="solid"/>
-                      <a:round/>
-                      <a:headEnd type="none" w="med" len="med"/>
-                      <a:tailEnd type="none" w="med" len="med"/>
-                    </a:lnT>
-                    <a:lnB w="12700" cap="flat" cmpd="sng" algn="ctr">
-                      <a:solidFill>
-                        <a:srgbClr val="D5DAE3"/>
-                      </a:solidFill>
-                      <a:prstDash val="solid"/>
-                      <a:round/>
-                      <a:headEnd type="none" w="med" len="med"/>
-                      <a:tailEnd type="none" w="med" len="med"/>
-                    </a:lnB>
-                  </a:tcPr>
-                </a:tc>
-                <a:tc>
-                  <a:txBody>
-                    <a:bodyPr/>
-                    <a:lstStyle/>
-                    <a:p>
-                      <a:pPr indent="0" marL="0">
-                        <a:buNone/>
-                      </a:pPr>
-                      <a:r>
-                        <a:rPr lang="en-US" sz="1250" dirty="0">
-                          <a:solidFill>
-                            <a:srgbClr val="1F2937"/>
-                          </a:solidFill>
-                          <a:latin typeface="Meiryo" pitchFamily="34" charset="0"/>
-                          <a:ea typeface="Meiryo" pitchFamily="34" charset="-122"/>
-                          <a:cs typeface="Meiryo" pitchFamily="34" charset="-120"/>
-                        </a:rPr>
-                        <a:t>文字の色</a:t>
-                      </a:r>
-                      <a:endParaRPr lang="en-US" sz="1250" dirty="0">
-                        <a:latin typeface="Meiryo" charset="0"/>
-                        <a:ea typeface="Meiryo" charset="0"/>
-                        <a:cs typeface="Meiryo" charset="0"/>
-                      </a:endParaRPr>
-                    </a:p>
-                  </a:txBody>
-                  <a:tcPr marL="91440" marR="91440" marT="45720" marB="45720">
-                    <a:lnL w="12700" cap="flat" cmpd="sng" algn="ctr">
-                      <a:solidFill>
-                        <a:srgbClr val="D5DAE3"/>
-                      </a:solidFill>
-                      <a:prstDash val="solid"/>
-                      <a:round/>
-                      <a:headEnd type="none" w="med" len="med"/>
-                      <a:tailEnd type="none" w="med" len="med"/>
-                    </a:lnL>
-                    <a:lnR w="12700" cap="flat" cmpd="sng" algn="ctr">
-                      <a:solidFill>
-                        <a:srgbClr val="D5DAE3"/>
-                      </a:solidFill>
-                      <a:prstDash val="solid"/>
-                      <a:round/>
-                      <a:headEnd type="none" w="med" len="med"/>
-                      <a:tailEnd type="none" w="med" len="med"/>
-                    </a:lnR>
-                    <a:lnT w="12700" cap="flat" cmpd="sng" algn="ctr">
-                      <a:solidFill>
-                        <a:srgbClr val="D5DAE3"/>
-                      </a:solidFill>
-                      <a:prstDash val="solid"/>
-                      <a:round/>
-                      <a:headEnd type="none" w="med" len="med"/>
-                      <a:tailEnd type="none" w="med" len="med"/>
-                    </a:lnT>
-                    <a:lnB w="12700" cap="flat" cmpd="sng" algn="ctr">
-                      <a:solidFill>
-                        <a:srgbClr val="D5DAE3"/>
-                      </a:solidFill>
-                      <a:prstDash val="solid"/>
-                      <a:round/>
-                      <a:headEnd type="none" w="med" len="med"/>
-                      <a:tailEnd type="none" w="med" len="med"/>
-                    </a:lnB>
-                  </a:tcPr>
-                </a:tc>
-                <a:tc>
-                  <a:txBody>
-                    <a:bodyPr/>
-                    <a:lstStyle/>
-                    <a:p>
-                      <a:pPr indent="0" marL="0">
-                        <a:buNone/>
-                      </a:pPr>
-                      <a:r>
-                        <a:rPr lang="en-US" sz="1250" dirty="0">
-                          <a:solidFill>
-                            <a:srgbClr val="1F2937"/>
-                          </a:solidFill>
-                          <a:latin typeface="Meiryo" pitchFamily="34" charset="0"/>
-                          <a:ea typeface="Meiryo" pitchFamily="34" charset="-122"/>
-                          <a:cs typeface="Meiryo" pitchFamily="34" charset="-120"/>
-                        </a:rPr>
-                        <a:t>#FFFFFF（白）</a:t>
-                      </a:r>
-                      <a:endParaRPr lang="en-US" sz="1250" dirty="0">
-                        <a:latin typeface="Meiryo" charset="0"/>
-                        <a:ea typeface="Meiryo" charset="0"/>
-                        <a:cs typeface="Meiryo" charset="0"/>
-                      </a:endParaRPr>
-                    </a:p>
-                  </a:txBody>
-                  <a:tcPr marL="91440" marR="91440" marT="45720" marB="45720">
-                    <a:lnL w="12700" cap="flat" cmpd="sng" algn="ctr">
-                      <a:solidFill>
-                        <a:srgbClr val="D5DAE3"/>
-                      </a:solidFill>
-                      <a:prstDash val="solid"/>
-                      <a:round/>
-                      <a:headEnd type="none" w="med" len="med"/>
-                      <a:tailEnd type="none" w="med" len="med"/>
-                    </a:lnL>
-                    <a:lnR w="12700" cap="flat" cmpd="sng" algn="ctr">
-                      <a:solidFill>
-                        <a:srgbClr val="D5DAE3"/>
-                      </a:solidFill>
-                      <a:prstDash val="solid"/>
-                      <a:round/>
-                      <a:headEnd type="none" w="med" len="med"/>
-                      <a:tailEnd type="none" w="med" len="med"/>
-                    </a:lnR>
-                    <a:lnT w="12700" cap="flat" cmpd="sng" algn="ctr">
-                      <a:solidFill>
-                        <a:srgbClr val="D5DAE3"/>
-                      </a:solidFill>
-                      <a:prstDash val="solid"/>
-                      <a:round/>
-                      <a:headEnd type="none" w="med" len="med"/>
-                      <a:tailEnd type="none" w="med" len="med"/>
-                    </a:lnT>
-                    <a:lnB w="12700" cap="flat" cmpd="sng" algn="ctr">
-                      <a:solidFill>
-                        <a:srgbClr val="D5DAE3"/>
-                      </a:solidFill>
-                      <a:prstDash val="solid"/>
-                      <a:round/>
-                      <a:headEnd type="none" w="med" len="med"/>
-                      <a:tailEnd type="none" w="med" len="med"/>
-                    </a:lnB>
-                  </a:tcPr>
-                </a:tc>
-              </a:tr>
-              <a:tr h="475488">
-                <a:tc>
-                  <a:txBody>
-                    <a:bodyPr/>
-                    <a:lstStyle/>
-                    <a:p>
-                      <a:pPr indent="0" marL="0">
-                        <a:buNone/>
-                      </a:pPr>
-                      <a:r>
-                        <a:rPr lang="en-US" sz="1250" b="1" dirty="0">
-                          <a:solidFill>
-                            <a:srgbClr val="1F2937"/>
-                          </a:solidFill>
-                          <a:latin typeface="Consolas" pitchFamily="34" charset="0"/>
-                          <a:ea typeface="Consolas" pitchFamily="34" charset="-122"/>
-                          <a:cs typeface="Consolas" pitchFamily="34" charset="-120"/>
-                        </a:rPr>
-                        <a:t>telop_stroke_color</a:t>
-                      </a:r>
-                      <a:endParaRPr lang="en-US" sz="1250" dirty="0">
-                        <a:latin typeface="Consolas" charset="0"/>
-                        <a:ea typeface="Consolas" charset="0"/>
-                        <a:cs typeface="Consolas" charset="0"/>
-                      </a:endParaRPr>
-                    </a:p>
-                  </a:txBody>
-                  <a:tcPr marL="91440" marR="91440" marT="45720" marB="45720">
-                    <a:lnL w="12700" cap="flat" cmpd="sng" algn="ctr">
-                      <a:solidFill>
-                        <a:srgbClr val="D5DAE3"/>
-                      </a:solidFill>
-                      <a:prstDash val="solid"/>
-                      <a:round/>
-                      <a:headEnd type="none" w="med" len="med"/>
-                      <a:tailEnd type="none" w="med" len="med"/>
-                    </a:lnL>
-                    <a:lnR w="12700" cap="flat" cmpd="sng" algn="ctr">
-                      <a:solidFill>
-                        <a:srgbClr val="D5DAE3"/>
-                      </a:solidFill>
-                      <a:prstDash val="solid"/>
-                      <a:round/>
-                      <a:headEnd type="none" w="med" len="med"/>
-                      <a:tailEnd type="none" w="med" len="med"/>
-                    </a:lnR>
-                    <a:lnT w="12700" cap="flat" cmpd="sng" algn="ctr">
-                      <a:solidFill>
-                        <a:srgbClr val="D5DAE3"/>
-                      </a:solidFill>
-                      <a:prstDash val="solid"/>
-                      <a:round/>
-                      <a:headEnd type="none" w="med" len="med"/>
-                      <a:tailEnd type="none" w="med" len="med"/>
-                    </a:lnT>
-                    <a:lnB w="12700" cap="flat" cmpd="sng" algn="ctr">
-                      <a:solidFill>
-                        <a:srgbClr val="D5DAE3"/>
-                      </a:solidFill>
-                      <a:prstDash val="solid"/>
-                      <a:round/>
-                      <a:headEnd type="none" w="med" len="med"/>
-                      <a:tailEnd type="none" w="med" len="med"/>
-                    </a:lnB>
-                  </a:tcPr>
-                </a:tc>
-                <a:tc>
-                  <a:txBody>
-                    <a:bodyPr/>
-                    <a:lstStyle/>
-                    <a:p>
-                      <a:pPr indent="0" marL="0">
-                        <a:buNone/>
-                      </a:pPr>
-                      <a:r>
-                        <a:rPr lang="en-US" sz="1250" dirty="0">
-                          <a:solidFill>
-                            <a:srgbClr val="1F2937"/>
-                          </a:solidFill>
-                          <a:latin typeface="Meiryo" pitchFamily="34" charset="0"/>
-                          <a:ea typeface="Meiryo" pitchFamily="34" charset="-122"/>
-                          <a:cs typeface="Meiryo" pitchFamily="34" charset="-120"/>
-                        </a:rPr>
-                        <a:t>縁取りの色</a:t>
-                      </a:r>
-                      <a:endParaRPr lang="en-US" sz="1250" dirty="0">
-                        <a:latin typeface="Meiryo" charset="0"/>
-                        <a:ea typeface="Meiryo" charset="0"/>
-                        <a:cs typeface="Meiryo" charset="0"/>
-                      </a:endParaRPr>
-                    </a:p>
-                  </a:txBody>
-                  <a:tcPr marL="91440" marR="91440" marT="45720" marB="45720">
-                    <a:lnL w="12700" cap="flat" cmpd="sng" algn="ctr">
-                      <a:solidFill>
-                        <a:srgbClr val="D5DAE3"/>
-                      </a:solidFill>
-                      <a:prstDash val="solid"/>
-                      <a:round/>
-                      <a:headEnd type="none" w="med" len="med"/>
-                      <a:tailEnd type="none" w="med" len="med"/>
-                    </a:lnL>
-                    <a:lnR w="12700" cap="flat" cmpd="sng" algn="ctr">
-                      <a:solidFill>
-                        <a:srgbClr val="D5DAE3"/>
-                      </a:solidFill>
-                      <a:prstDash val="solid"/>
-                      <a:round/>
-                      <a:headEnd type="none" w="med" len="med"/>
-                      <a:tailEnd type="none" w="med" len="med"/>
-                    </a:lnR>
-                    <a:lnT w="12700" cap="flat" cmpd="sng" algn="ctr">
-                      <a:solidFill>
-                        <a:srgbClr val="D5DAE3"/>
-                      </a:solidFill>
-                      <a:prstDash val="solid"/>
-                      <a:round/>
-                      <a:headEnd type="none" w="med" len="med"/>
-                      <a:tailEnd type="none" w="med" len="med"/>
-                    </a:lnT>
-                    <a:lnB w="12700" cap="flat" cmpd="sng" algn="ctr">
-                      <a:solidFill>
-                        <a:srgbClr val="D5DAE3"/>
-                      </a:solidFill>
-                      <a:prstDash val="solid"/>
-                      <a:round/>
-                      <a:headEnd type="none" w="med" len="med"/>
-                      <a:tailEnd type="none" w="med" len="med"/>
-                    </a:lnB>
-                  </a:tcPr>
-                </a:tc>
-                <a:tc>
-                  <a:txBody>
-                    <a:bodyPr/>
-                    <a:lstStyle/>
-                    <a:p>
-                      <a:pPr indent="0" marL="0">
-                        <a:buNone/>
-                      </a:pPr>
-                      <a:r>
-                        <a:rPr lang="en-US" sz="1250" dirty="0">
-                          <a:solidFill>
-                            <a:srgbClr val="1F2937"/>
-                          </a:solidFill>
-                          <a:latin typeface="Meiryo" pitchFamily="34" charset="0"/>
-                          <a:ea typeface="Meiryo" pitchFamily="34" charset="-122"/>
-                          <a:cs typeface="Meiryo" pitchFamily="34" charset="-120"/>
-                        </a:rPr>
-                        <a:t>#000000（黒）</a:t>
-                      </a:r>
-                      <a:endParaRPr lang="en-US" sz="1250" dirty="0">
-                        <a:latin typeface="Meiryo" charset="0"/>
-                        <a:ea typeface="Meiryo" charset="0"/>
-                        <a:cs typeface="Meiryo" charset="0"/>
-                      </a:endParaRPr>
-                    </a:p>
-                  </a:txBody>
-                  <a:tcPr marL="91440" marR="91440" marT="45720" marB="45720">
-                    <a:lnL w="12700" cap="flat" cmpd="sng" algn="ctr">
-                      <a:solidFill>
-                        <a:srgbClr val="D5DAE3"/>
-                      </a:solidFill>
-                      <a:prstDash val="solid"/>
-                      <a:round/>
-                      <a:headEnd type="none" w="med" len="med"/>
-                      <a:tailEnd type="none" w="med" len="med"/>
-                    </a:lnL>
-                    <a:lnR w="12700" cap="flat" cmpd="sng" algn="ctr">
-                      <a:solidFill>
-                        <a:srgbClr val="D5DAE3"/>
-                      </a:solidFill>
-                      <a:prstDash val="solid"/>
-                      <a:round/>
-                      <a:headEnd type="none" w="med" len="med"/>
-                      <a:tailEnd type="none" w="med" len="med"/>
-                    </a:lnR>
-                    <a:lnT w="12700" cap="flat" cmpd="sng" algn="ctr">
-                      <a:solidFill>
-                        <a:srgbClr val="D5DAE3"/>
-                      </a:solidFill>
-                      <a:prstDash val="solid"/>
-                      <a:round/>
-                      <a:headEnd type="none" w="med" len="med"/>
-                      <a:tailEnd type="none" w="med" len="med"/>
-                    </a:lnT>
-                    <a:lnB w="12700" cap="flat" cmpd="sng" algn="ctr">
-                      <a:solidFill>
-                        <a:srgbClr val="D5DAE3"/>
-                      </a:solidFill>
-                      <a:prstDash val="solid"/>
-                      <a:round/>
-                      <a:headEnd type="none" w="med" len="med"/>
-                      <a:tailEnd type="none" w="med" len="med"/>
-                    </a:lnB>
-                  </a:tcPr>
-                </a:tc>
-              </a:tr>
-              <a:tr h="475488">
-                <a:tc>
-                  <a:txBody>
-                    <a:bodyPr/>
-                    <a:lstStyle/>
-                    <a:p>
-                      <a:pPr indent="0" marL="0">
-                        <a:buNone/>
-                      </a:pPr>
-                      <a:r>
-                        <a:rPr lang="en-US" sz="1250" b="1" dirty="0">
-                          <a:solidFill>
-                            <a:srgbClr val="1F2937"/>
-                          </a:solidFill>
-                          <a:latin typeface="Consolas" pitchFamily="34" charset="0"/>
-                          <a:ea typeface="Consolas" pitchFamily="34" charset="-122"/>
-                          <a:cs typeface="Consolas" pitchFamily="34" charset="-120"/>
-                        </a:rPr>
-                        <a:t>telop_stroke_width</a:t>
-                      </a:r>
-                      <a:endParaRPr lang="en-US" sz="1250" dirty="0">
-                        <a:latin typeface="Consolas" charset="0"/>
-                        <a:ea typeface="Consolas" charset="0"/>
-                        <a:cs typeface="Consolas" charset="0"/>
-                      </a:endParaRPr>
-                    </a:p>
-                  </a:txBody>
-                  <a:tcPr marL="91440" marR="91440" marT="45720" marB="45720">
-                    <a:lnL w="12700" cap="flat" cmpd="sng" algn="ctr">
-                      <a:solidFill>
-                        <a:srgbClr val="D5DAE3"/>
-                      </a:solidFill>
-                      <a:prstDash val="solid"/>
-                      <a:round/>
-                      <a:headEnd type="none" w="med" len="med"/>
-                      <a:tailEnd type="none" w="med" len="med"/>
-                    </a:lnL>
-                    <a:lnR w="12700" cap="flat" cmpd="sng" algn="ctr">
-                      <a:solidFill>
-                        <a:srgbClr val="D5DAE3"/>
-                      </a:solidFill>
-                      <a:prstDash val="solid"/>
-                      <a:round/>
-                      <a:headEnd type="none" w="med" len="med"/>
-                      <a:tailEnd type="none" w="med" len="med"/>
-                    </a:lnR>
-                    <a:lnT w="12700" cap="flat" cmpd="sng" algn="ctr">
-                      <a:solidFill>
-                        <a:srgbClr val="D5DAE3"/>
-                      </a:solidFill>
-                      <a:prstDash val="solid"/>
-                      <a:round/>
-                      <a:headEnd type="none" w="med" len="med"/>
-                      <a:tailEnd type="none" w="med" len="med"/>
-                    </a:lnT>
-                    <a:lnB w="12700" cap="flat" cmpd="sng" algn="ctr">
-                      <a:solidFill>
-                        <a:srgbClr val="D5DAE3"/>
-                      </a:solidFill>
-                      <a:prstDash val="solid"/>
-                      <a:round/>
-                      <a:headEnd type="none" w="med" len="med"/>
-                      <a:tailEnd type="none" w="med" len="med"/>
-                    </a:lnB>
-                  </a:tcPr>
-                </a:tc>
-                <a:tc>
-                  <a:txBody>
-                    <a:bodyPr/>
-                    <a:lstStyle/>
-                    <a:p>
-                      <a:pPr indent="0" marL="0">
-                        <a:buNone/>
-                      </a:pPr>
-                      <a:r>
-                        <a:rPr lang="en-US" sz="1250" dirty="0">
-                          <a:solidFill>
-                            <a:srgbClr val="1F2937"/>
-                          </a:solidFill>
-                          <a:latin typeface="Meiryo" pitchFamily="34" charset="0"/>
-                          <a:ea typeface="Meiryo" pitchFamily="34" charset="-122"/>
-                          <a:cs typeface="Meiryo" pitchFamily="34" charset="-120"/>
-                        </a:rPr>
-                        <a:t>縁取りの太さ</a:t>
-                      </a:r>
-                      <a:endParaRPr lang="en-US" sz="1250" dirty="0">
-                        <a:latin typeface="Meiryo" charset="0"/>
-                        <a:ea typeface="Meiryo" charset="0"/>
-                        <a:cs typeface="Meiryo" charset="0"/>
-                      </a:endParaRPr>
-                    </a:p>
-                  </a:txBody>
-                  <a:tcPr marL="91440" marR="91440" marT="45720" marB="45720">
-                    <a:lnL w="12700" cap="flat" cmpd="sng" algn="ctr">
-                      <a:solidFill>
-                        <a:srgbClr val="D5DAE3"/>
-                      </a:solidFill>
-                      <a:prstDash val="solid"/>
-                      <a:round/>
-                      <a:headEnd type="none" w="med" len="med"/>
-                      <a:tailEnd type="none" w="med" len="med"/>
-                    </a:lnL>
-                    <a:lnR w="12700" cap="flat" cmpd="sng" algn="ctr">
-                      <a:solidFill>
-                        <a:srgbClr val="D5DAE3"/>
-                      </a:solidFill>
-                      <a:prstDash val="solid"/>
-                      <a:round/>
-                      <a:headEnd type="none" w="med" len="med"/>
-                      <a:tailEnd type="none" w="med" len="med"/>
-                    </a:lnR>
-                    <a:lnT w="12700" cap="flat" cmpd="sng" algn="ctr">
-                      <a:solidFill>
-                        <a:srgbClr val="D5DAE3"/>
-                      </a:solidFill>
-                      <a:prstDash val="solid"/>
-                      <a:round/>
-                      <a:headEnd type="none" w="med" len="med"/>
-                      <a:tailEnd type="none" w="med" len="med"/>
-                    </a:lnT>
-                    <a:lnB w="12700" cap="flat" cmpd="sng" algn="ctr">
-                      <a:solidFill>
-                        <a:srgbClr val="D5DAE3"/>
-                      </a:solidFill>
-                      <a:prstDash val="solid"/>
-                      <a:round/>
-                      <a:headEnd type="none" w="med" len="med"/>
-                      <a:tailEnd type="none" w="med" len="med"/>
-                    </a:lnB>
-                  </a:tcPr>
-                </a:tc>
-                <a:tc>
-                  <a:txBody>
-                    <a:bodyPr/>
-                    <a:lstStyle/>
-                    <a:p>
-                      <a:pPr indent="0" marL="0">
-                        <a:buNone/>
-                      </a:pPr>
-                      <a:r>
-                        <a:rPr lang="en-US" sz="1250" dirty="0">
-                          <a:solidFill>
-                            <a:srgbClr val="1F2937"/>
-                          </a:solidFill>
-                          <a:latin typeface="Meiryo" pitchFamily="34" charset="0"/>
-                          <a:ea typeface="Meiryo" pitchFamily="34" charset="-122"/>
-                          <a:cs typeface="Meiryo" pitchFamily="34" charset="-120"/>
-                        </a:rPr>
-                        <a:t>8</a:t>
-                      </a:r>
-                      <a:endParaRPr lang="en-US" sz="1250" dirty="0">
-                        <a:latin typeface="Meiryo" charset="0"/>
-                        <a:ea typeface="Meiryo" charset="0"/>
-                        <a:cs typeface="Meiryo" charset="0"/>
-                      </a:endParaRPr>
-                    </a:p>
-                  </a:txBody>
-                  <a:tcPr marL="91440" marR="91440" marT="45720" marB="45720">
-                    <a:lnL w="12700" cap="flat" cmpd="sng" algn="ctr">
-                      <a:solidFill>
-                        <a:srgbClr val="D5DAE3"/>
-                      </a:solidFill>
-                      <a:prstDash val="solid"/>
-                      <a:round/>
-                      <a:headEnd type="none" w="med" len="med"/>
-                      <a:tailEnd type="none" w="med" len="med"/>
-                    </a:lnL>
-                    <a:lnR w="12700" cap="flat" cmpd="sng" algn="ctr">
-                      <a:solidFill>
-                        <a:srgbClr val="D5DAE3"/>
-                      </a:solidFill>
-                      <a:prstDash val="solid"/>
-                      <a:round/>
-                      <a:headEnd type="none" w="med" len="med"/>
-                      <a:tailEnd type="none" w="med" len="med"/>
-                    </a:lnR>
-                    <a:lnT w="12700" cap="flat" cmpd="sng" algn="ctr">
-                      <a:solidFill>
-                        <a:srgbClr val="D5DAE3"/>
-                      </a:solidFill>
-                      <a:prstDash val="solid"/>
-                      <a:round/>
-                      <a:headEnd type="none" w="med" len="med"/>
-                      <a:tailEnd type="none" w="med" len="med"/>
-                    </a:lnT>
-                    <a:lnB w="12700" cap="flat" cmpd="sng" algn="ctr">
-                      <a:solidFill>
-                        <a:srgbClr val="D5DAE3"/>
-                      </a:solidFill>
-                      <a:prstDash val="solid"/>
-                      <a:round/>
-                      <a:headEnd type="none" w="med" len="med"/>
-                      <a:tailEnd type="none" w="med" len="med"/>
-                    </a:lnB>
-                  </a:tcPr>
-                </a:tc>
-              </a:tr>
-              <a:tr h="475488">
-                <a:tc>
-                  <a:txBody>
-                    <a:bodyPr/>
-                    <a:lstStyle/>
-                    <a:p>
-                      <a:pPr indent="0" marL="0">
-                        <a:buNone/>
-                      </a:pPr>
-                      <a:r>
-                        <a:rPr lang="en-US" sz="1250" b="1" dirty="0">
-                          <a:solidFill>
-                            <a:srgbClr val="1F2937"/>
-                          </a:solidFill>
-                          <a:latin typeface="Consolas" pitchFamily="34" charset="0"/>
-                          <a:ea typeface="Consolas" pitchFamily="34" charset="-122"/>
-                          <a:cs typeface="Consolas" pitchFamily="34" charset="-120"/>
-                        </a:rPr>
-                        <a:t>telop_font</a:t>
-                      </a:r>
-                      <a:endParaRPr lang="en-US" sz="1250" dirty="0">
-                        <a:latin typeface="Consolas" charset="0"/>
-                        <a:ea typeface="Consolas" charset="0"/>
-                        <a:cs typeface="Consolas" charset="0"/>
-                      </a:endParaRPr>
-                    </a:p>
-                  </a:txBody>
-                  <a:tcPr marL="91440" marR="91440" marT="45720" marB="45720">
-                    <a:lnL w="12700" cap="flat" cmpd="sng" algn="ctr">
-                      <a:solidFill>
-                        <a:srgbClr val="D5DAE3"/>
-                      </a:solidFill>
-                      <a:prstDash val="solid"/>
-                      <a:round/>
-                      <a:headEnd type="none" w="med" len="med"/>
-                      <a:tailEnd type="none" w="med" len="med"/>
-                    </a:lnL>
-                    <a:lnR w="12700" cap="flat" cmpd="sng" algn="ctr">
-                      <a:solidFill>
-                        <a:srgbClr val="D5DAE3"/>
-                      </a:solidFill>
-                      <a:prstDash val="solid"/>
-                      <a:round/>
-                      <a:headEnd type="none" w="med" len="med"/>
-                      <a:tailEnd type="none" w="med" len="med"/>
-                    </a:lnR>
-                    <a:lnT w="12700" cap="flat" cmpd="sng" algn="ctr">
-                      <a:solidFill>
-                        <a:srgbClr val="D5DAE3"/>
-                      </a:solidFill>
-                      <a:prstDash val="solid"/>
-                      <a:round/>
-                      <a:headEnd type="none" w="med" len="med"/>
-                      <a:tailEnd type="none" w="med" len="med"/>
-                    </a:lnT>
-                    <a:lnB w="12700" cap="flat" cmpd="sng" algn="ctr">
-                      <a:solidFill>
-                        <a:srgbClr val="D5DAE3"/>
-                      </a:solidFill>
-                      <a:prstDash val="solid"/>
-                      <a:round/>
-                      <a:headEnd type="none" w="med" len="med"/>
-                      <a:tailEnd type="none" w="med" len="med"/>
-                    </a:lnB>
-                  </a:tcPr>
-                </a:tc>
-                <a:tc>
-                  <a:txBody>
-                    <a:bodyPr/>
-                    <a:lstStyle/>
-                    <a:p>
-                      <a:pPr indent="0" marL="0">
-                        <a:buNone/>
-                      </a:pPr>
-                      <a:r>
-                        <a:rPr lang="en-US" sz="1250" dirty="0">
-                          <a:solidFill>
-                            <a:srgbClr val="1F2937"/>
-                          </a:solidFill>
-                          <a:latin typeface="Meiryo" pitchFamily="34" charset="0"/>
-                          <a:ea typeface="Meiryo" pitchFamily="34" charset="-122"/>
-                          <a:cs typeface="Meiryo" pitchFamily="34" charset="-120"/>
-                        </a:rPr>
-                        <a:t>フォントファイル（空ならメイリオ）</a:t>
-                      </a:r>
-                      <a:endParaRPr lang="en-US" sz="1250" dirty="0">
-                        <a:latin typeface="Meiryo" charset="0"/>
-                        <a:ea typeface="Meiryo" charset="0"/>
-                        <a:cs typeface="Meiryo" charset="0"/>
-                      </a:endParaRPr>
-                    </a:p>
-                  </a:txBody>
-                  <a:tcPr marL="91440" marR="91440" marT="45720" marB="45720">
-                    <a:lnL w="12700" cap="flat" cmpd="sng" algn="ctr">
-                      <a:solidFill>
-                        <a:srgbClr val="D5DAE3"/>
-                      </a:solidFill>
-                      <a:prstDash val="solid"/>
-                      <a:round/>
-                      <a:headEnd type="none" w="med" len="med"/>
-                      <a:tailEnd type="none" w="med" len="med"/>
-                    </a:lnL>
-                    <a:lnR w="12700" cap="flat" cmpd="sng" algn="ctr">
-                      <a:solidFill>
-                        <a:srgbClr val="D5DAE3"/>
-                      </a:solidFill>
-                      <a:prstDash val="solid"/>
-                      <a:round/>
-                      <a:headEnd type="none" w="med" len="med"/>
-                      <a:tailEnd type="none" w="med" len="med"/>
-                    </a:lnR>
-                    <a:lnT w="12700" cap="flat" cmpd="sng" algn="ctr">
-                      <a:solidFill>
-                        <a:srgbClr val="D5DAE3"/>
-                      </a:solidFill>
-                      <a:prstDash val="solid"/>
-                      <a:round/>
-                      <a:headEnd type="none" w="med" len="med"/>
-                      <a:tailEnd type="none" w="med" len="med"/>
-                    </a:lnT>
-                    <a:lnB w="12700" cap="flat" cmpd="sng" algn="ctr">
-                      <a:solidFill>
-                        <a:srgbClr val="D5DAE3"/>
-                      </a:solidFill>
-                      <a:prstDash val="solid"/>
-                      <a:round/>
-                      <a:headEnd type="none" w="med" len="med"/>
-                      <a:tailEnd type="none" w="med" len="med"/>
-                    </a:lnB>
-                  </a:tcPr>
-                </a:tc>
-                <a:tc>
-                  <a:txBody>
-                    <a:bodyPr/>
-                    <a:lstStyle/>
-                    <a:p>
-                      <a:pPr indent="0" marL="0">
-                        <a:buNone/>
-                      </a:pPr>
-                      <a:r>
-                        <a:rPr lang="en-US" sz="1250" dirty="0">
-                          <a:solidFill>
-                            <a:srgbClr val="1F2937"/>
-                          </a:solidFill>
-                          <a:latin typeface="Meiryo" pitchFamily="34" charset="0"/>
-                          <a:ea typeface="Meiryo" pitchFamily="34" charset="-122"/>
-                          <a:cs typeface="Meiryo" pitchFamily="34" charset="-120"/>
-                        </a:rPr>
-                        <a:t>""</a:t>
-                      </a:r>
-                      <a:endParaRPr lang="en-US" sz="1250" dirty="0">
-                        <a:latin typeface="Meiryo" charset="0"/>
-                        <a:ea typeface="Meiryo" charset="0"/>
-                        <a:cs typeface="Meiryo" charset="0"/>
-                      </a:endParaRPr>
-                    </a:p>
-                  </a:txBody>
-                  <a:tcPr marL="91440" marR="91440" marT="45720" marB="45720">
-                    <a:lnL w="12700" cap="flat" cmpd="sng" algn="ctr">
-                      <a:solidFill>
-                        <a:srgbClr val="D5DAE3"/>
-                      </a:solidFill>
-                      <a:prstDash val="solid"/>
-                      <a:round/>
-                      <a:headEnd type="none" w="med" len="med"/>
-                      <a:tailEnd type="none" w="med" len="med"/>
-                    </a:lnL>
-                    <a:lnR w="12700" cap="flat" cmpd="sng" algn="ctr">
-                      <a:solidFill>
-                        <a:srgbClr val="D5DAE3"/>
-                      </a:solidFill>
-                      <a:prstDash val="solid"/>
-                      <a:round/>
-                      <a:headEnd type="none" w="med" len="med"/>
-                      <a:tailEnd type="none" w="med" len="med"/>
-                    </a:lnR>
-                    <a:lnT w="12700" cap="flat" cmpd="sng" algn="ctr">
-                      <a:solidFill>
-                        <a:srgbClr val="D5DAE3"/>
-                      </a:solidFill>
-                      <a:prstDash val="solid"/>
-                      <a:round/>
-                      <a:headEnd type="none" w="med" len="med"/>
-                      <a:tailEnd type="none" w="med" len="med"/>
-                    </a:lnT>
-                    <a:lnB w="12700" cap="flat" cmpd="sng" algn="ctr">
-                      <a:solidFill>
-                        <a:srgbClr val="D5DAE3"/>
-                      </a:solidFill>
-                      <a:prstDash val="solid"/>
-                      <a:round/>
-                      <a:headEnd type="none" w="med" len="med"/>
-                      <a:tailEnd type="none" w="med" len="med"/>
-                    </a:lnB>
-                  </a:tcPr>
-                </a:tc>
-              </a:tr>
-            </a:tbl>
-          </a:graphicData>
-        </a:graphic>
-      </p:graphicFrame>
-      <p:sp>
-        <p:nvSpPr>
-          <p:cNvPr id="5" name="Shape 2"/>
+      <p:sp>
+        <p:nvSpPr>
+          <p:cNvPr id="4" name="Shape 2"/>
           <p:cNvSpPr/>
           <p:nvPr/>
         </p:nvSpPr>
         <p:spPr>
           <a:xfrm>
-            <a:off x="7680960" y="1645920"/>
-            <a:ext cx="3977640" cy="2834640"/>
+            <a:off x="548640" y="1737360"/>
+            <a:ext cx="3429000" cy="3017520"/>
           </a:xfrm>
           <a:prstGeom prst="roundRect">
             <a:avLst>
-              <a:gd name="adj" fmla="val 2581"/>
+              <a:gd name="adj" fmla="val 3636"/>
             </a:avLst>
           </a:prstGeom>
           <a:solidFill>
-            <a:srgbClr val="1E2430"/>
+            <a:srgbClr val="F2F4F8"/>
           </a:solidFill>
           <a:ln w="12700">
             <a:solidFill>
-              <a:srgbClr val="1E2430"/>
+              <a:srgbClr val="F2F4F8"/>
             </a:solidFill>
             <a:prstDash val="solid"/>
           </a:ln>
@@ -8241,14 +6822,117 @@
       </p:sp>
       <p:sp>
         <p:nvSpPr>
-          <p:cNvPr id="6" name="Text 3"/>
-          <p:cNvSpPr txBox="1"/>
-          <p:nvPr/>
-        </p:nvSpPr>
-        <p:spPr>
-          <a:xfrm>
-            <a:off x="7863840" y="1755648"/>
-            <a:ext cx="3611880" cy="2615184"/>
+          <p:cNvPr id="5" name="Shape 3"/>
+          <p:cNvSpPr/>
+          <p:nvPr/>
+        </p:nvSpPr>
+        <p:spPr>
+          <a:xfrm>
+            <a:off x="822960" y="2011680"/>
+            <a:ext cx="548640" cy="548640"/>
+          </a:xfrm>
+          <a:prstGeom prst="ellipse">
+            <a:avLst/>
+          </a:prstGeom>
+          <a:solidFill>
+            <a:srgbClr val="F28C28"/>
+          </a:solidFill>
+          <a:ln w="12700">
+            <a:solidFill>
+              <a:srgbClr val="F28C28"/>
+            </a:solidFill>
+            <a:prstDash val="solid"/>
+          </a:ln>
+        </p:spPr>
+      </p:sp>
+      <p:sp>
+        <p:nvSpPr>
+          <p:cNvPr id="6" name="Text 4"/>
+          <p:cNvSpPr txBox="1"/>
+          <p:nvPr/>
+        </p:nvSpPr>
+        <p:spPr>
+          <a:xfrm>
+            <a:off x="822960" y="2011680"/>
+            <a:ext cx="548640" cy="548640"/>
+          </a:xfrm>
+          <a:prstGeom prst="rect">
+            <a:avLst/>
+          </a:prstGeom>
+          <a:noFill/>
+          <a:ln/>
+        </p:spPr>
+        <p:txBody>
+          <a:bodyPr wrap="square" lIns="0" tIns="0" rIns="0" bIns="0" rtlCol="0" anchor="ctr"/>
+          <a:lstStyle/>
+          <a:p>
+            <a:pPr algn="ctr" indent="0" marL="0">
+              <a:buNone/>
+            </a:pPr>
+            <a:r>
+              <a:rPr lang="en-US" sz="2040" b="1" dirty="0">
+                <a:solidFill>
+                  <a:srgbClr val="FFFFFF"/>
+                </a:solidFill>
+                <a:latin typeface="Meiryo" pitchFamily="34" charset="0"/>
+                <a:ea typeface="Meiryo" pitchFamily="34" charset="-122"/>
+                <a:cs typeface="Meiryo" pitchFamily="34" charset="-120"/>
+              </a:rPr>
+              <a:t>1</a:t>
+            </a:r>
+            <a:endParaRPr lang="en-US" sz="2040" dirty="0"/>
+          </a:p>
+        </p:txBody>
+      </p:sp>
+      <p:sp>
+        <p:nvSpPr>
+          <p:cNvPr id="7" name="Text 5"/>
+          <p:cNvSpPr txBox="1"/>
+          <p:nvPr/>
+        </p:nvSpPr>
+        <p:spPr>
+          <a:xfrm>
+            <a:off x="1508760" y="2011680"/>
+            <a:ext cx="2331720" cy="548640"/>
+          </a:xfrm>
+          <a:prstGeom prst="rect">
+            <a:avLst/>
+          </a:prstGeom>
+          <a:noFill/>
+          <a:ln/>
+        </p:spPr>
+        <p:txBody>
+          <a:bodyPr wrap="square" lIns="0" tIns="0" rIns="0" bIns="0" rtlCol="0" anchor="ctr"/>
+          <a:lstStyle/>
+          <a:p>
+            <a:pPr indent="0" marL="0">
+              <a:buNone/>
+            </a:pPr>
+            <a:r>
+              <a:rPr lang="en-US" sz="1800" b="1" dirty="0">
+                <a:solidFill>
+                  <a:srgbClr val="1F2937"/>
+                </a:solidFill>
+                <a:latin typeface="Meiryo" pitchFamily="34" charset="0"/>
+                <a:ea typeface="Meiryo" pitchFamily="34" charset="-122"/>
+                <a:cs typeface="Meiryo" pitchFamily="34" charset="-120"/>
+              </a:rPr>
+              <a:t>Text+ を置く</a:t>
+            </a:r>
+            <a:endParaRPr lang="en-US" sz="1800" dirty="0"/>
+          </a:p>
+        </p:txBody>
+      </p:sp>
+      <p:sp>
+        <p:nvSpPr>
+          <p:cNvPr id="8" name="Text 6"/>
+          <p:cNvSpPr txBox="1"/>
+          <p:nvPr/>
+        </p:nvSpPr>
+        <p:spPr>
+          <a:xfrm>
+            <a:off x="822960" y="2788920"/>
+            <a:ext cx="2971800" cy="1828800"/>
           </a:xfrm>
           <a:prstGeom prst="rect">
             <a:avLst/>
@@ -8264,149 +6948,81 @@
               <a:buNone/>
             </a:pPr>
             <a:r>
-              <a:rPr lang="en-US" sz="1300" dirty="0">
-                <a:solidFill>
-                  <a:srgbClr val="E6EDF3"/>
-                </a:solidFill>
-                <a:latin typeface="Consolas" pitchFamily="34" charset="0"/>
-                <a:ea typeface="Consolas" pitchFamily="34" charset="-122"/>
-                <a:cs typeface="Consolas" pitchFamily="34" charset="-120"/>
-              </a:rPr>
-              <a:t>{</a:t>
-            </a:r>
-            <a:endParaRPr lang="en-US" sz="1300" dirty="0"/>
+              <a:rPr lang="en-US" sz="1350" dirty="0">
+                <a:solidFill>
+                  <a:srgbClr val="1F2937"/>
+                </a:solidFill>
+                <a:latin typeface="Meiryo" pitchFamily="34" charset="0"/>
+                <a:ea typeface="Meiryo" pitchFamily="34" charset="-122"/>
+                <a:cs typeface="Meiryo" pitchFamily="34" charset="-120"/>
+              </a:rPr>
+              <a:t>エディットページで</a:t>
+            </a:r>
+            <a:endParaRPr lang="en-US" sz="1350" dirty="0"/>
           </a:p>
           <a:p>
             <a:pPr indent="0" marL="0">
               <a:buNone/>
             </a:pPr>
             <a:r>
-              <a:rPr lang="en-US" sz="1300" dirty="0">
-                <a:solidFill>
-                  <a:srgbClr val="E6EDF3"/>
-                </a:solidFill>
-                <a:latin typeface="Consolas" pitchFamily="34" charset="0"/>
-                <a:ea typeface="Consolas" pitchFamily="34" charset="-122"/>
-                <a:cs typeface="Consolas" pitchFamily="34" charset="-120"/>
-              </a:rPr>
-              <a:t>  "fps": 30,</a:t>
-            </a:r>
-            <a:endParaRPr lang="en-US" sz="1300" dirty="0"/>
+              <a:rPr lang="en-US" sz="1350" dirty="0">
+                <a:solidFill>
+                  <a:srgbClr val="1F2937"/>
+                </a:solidFill>
+                <a:latin typeface="Meiryo" pitchFamily="34" charset="0"/>
+                <a:ea typeface="Meiryo" pitchFamily="34" charset="-122"/>
+                <a:cs typeface="Meiryo" pitchFamily="34" charset="-120"/>
+              </a:rPr>
+              <a:t>エフェクト → タイトル →</a:t>
+            </a:r>
+            <a:endParaRPr lang="en-US" sz="1350" dirty="0"/>
           </a:p>
           <a:p>
             <a:pPr indent="0" marL="0">
               <a:buNone/>
             </a:pPr>
             <a:r>
-              <a:rPr lang="en-US" sz="1300" dirty="0">
-                <a:solidFill>
-                  <a:srgbClr val="E6EDF3"/>
-                </a:solidFill>
-                <a:latin typeface="Consolas" pitchFamily="34" charset="0"/>
-                <a:ea typeface="Consolas" pitchFamily="34" charset="-122"/>
-                <a:cs typeface="Consolas" pitchFamily="34" charset="-120"/>
-              </a:rPr>
-              <a:t>  "width": 1080,</a:t>
-            </a:r>
-            <a:endParaRPr lang="en-US" sz="1300" dirty="0"/>
+              <a:rPr lang="en-US" sz="1350" dirty="0">
+                <a:solidFill>
+                  <a:srgbClr val="1F2937"/>
+                </a:solidFill>
+                <a:latin typeface="Meiryo" pitchFamily="34" charset="0"/>
+                <a:ea typeface="Meiryo" pitchFamily="34" charset="-122"/>
+                <a:cs typeface="Meiryo" pitchFamily="34" charset="-120"/>
+              </a:rPr>
+              <a:t>Fusionタイトル →「Text+」を</a:t>
+            </a:r>
+            <a:endParaRPr lang="en-US" sz="1350" dirty="0"/>
           </a:p>
           <a:p>
             <a:pPr indent="0" marL="0">
               <a:buNone/>
             </a:pPr>
             <a:r>
-              <a:rPr lang="en-US" sz="1300" dirty="0">
-                <a:solidFill>
-                  <a:srgbClr val="E6EDF3"/>
-                </a:solidFill>
-                <a:latin typeface="Consolas" pitchFamily="34" charset="0"/>
-                <a:ea typeface="Consolas" pitchFamily="34" charset="-122"/>
-                <a:cs typeface="Consolas" pitchFamily="34" charset="-120"/>
-              </a:rPr>
-              <a:t>  "height": 1920,</a:t>
-            </a:r>
-            <a:endParaRPr lang="en-US" sz="1300" dirty="0"/>
-          </a:p>
-          <a:p>
-            <a:pPr indent="0" marL="0">
-              <a:buNone/>
-            </a:pPr>
-            <a:r>
-              <a:rPr lang="en-US" sz="1300" dirty="0">
-                <a:solidFill>
-                  <a:srgbClr val="E6EDF3"/>
-                </a:solidFill>
-                <a:latin typeface="Consolas" pitchFamily="34" charset="0"/>
-                <a:ea typeface="Consolas" pitchFamily="34" charset="-122"/>
-                <a:cs typeface="Consolas" pitchFamily="34" charset="-120"/>
-              </a:rPr>
-              <a:t>  "telop_size": 70,</a:t>
-            </a:r>
-            <a:endParaRPr lang="en-US" sz="1300" dirty="0"/>
-          </a:p>
-          <a:p>
-            <a:pPr indent="0" marL="0">
-              <a:buNone/>
-            </a:pPr>
-            <a:r>
-              <a:rPr lang="en-US" sz="1300" dirty="0">
-                <a:solidFill>
-                  <a:srgbClr val="E6EDF3"/>
-                </a:solidFill>
-                <a:latin typeface="Consolas" pitchFamily="34" charset="0"/>
-                <a:ea typeface="Consolas" pitchFamily="34" charset="-122"/>
-                <a:cs typeface="Consolas" pitchFamily="34" charset="-120"/>
-              </a:rPr>
-              <a:t>  "telop_y": 0.7,</a:t>
-            </a:r>
-            <a:endParaRPr lang="en-US" sz="1300" dirty="0"/>
-          </a:p>
-          <a:p>
-            <a:pPr indent="0" marL="0">
-              <a:buNone/>
-            </a:pPr>
-            <a:r>
-              <a:rPr lang="en-US" sz="1300" dirty="0">
-                <a:solidFill>
-                  <a:srgbClr val="E6EDF3"/>
-                </a:solidFill>
-                <a:latin typeface="Consolas" pitchFamily="34" charset="0"/>
-                <a:ea typeface="Consolas" pitchFamily="34" charset="-122"/>
-                <a:cs typeface="Consolas" pitchFamily="34" charset="-120"/>
-              </a:rPr>
-              <a:t>  ...</a:t>
-            </a:r>
-            <a:endParaRPr lang="en-US" sz="1300" dirty="0"/>
-          </a:p>
-          <a:p>
-            <a:pPr indent="0" marL="0">
-              <a:buNone/>
-            </a:pPr>
-            <a:r>
-              <a:rPr lang="en-US" sz="1300" dirty="0">
-                <a:solidFill>
-                  <a:srgbClr val="E6EDF3"/>
-                </a:solidFill>
-                <a:latin typeface="Consolas" pitchFamily="34" charset="0"/>
-                <a:ea typeface="Consolas" pitchFamily="34" charset="-122"/>
-                <a:cs typeface="Consolas" pitchFamily="34" charset="-120"/>
-              </a:rPr>
-              <a:t>}</a:t>
-            </a:r>
-            <a:endParaRPr lang="en-US" sz="1300" dirty="0"/>
-          </a:p>
-        </p:txBody>
-      </p:sp>
-      <p:sp>
-        <p:nvSpPr>
-          <p:cNvPr id="7" name="Text 4"/>
-          <p:cNvSpPr txBox="1"/>
-          <p:nvPr/>
-        </p:nvSpPr>
-        <p:spPr>
-          <a:xfrm>
-            <a:off x="7680960" y="4572000"/>
-            <a:ext cx="3977640" cy="365760"/>
+              <a:rPr lang="en-US" sz="1350" dirty="0">
+                <a:solidFill>
+                  <a:srgbClr val="1F2937"/>
+                </a:solidFill>
+                <a:latin typeface="Meiryo" pitchFamily="34" charset="0"/>
+                <a:ea typeface="Meiryo" pitchFamily="34" charset="-122"/>
+                <a:cs typeface="Meiryo" pitchFamily="34" charset="-120"/>
+              </a:rPr>
+              <a:t>タイムラインへ</a:t>
+            </a:r>
+            <a:endParaRPr lang="en-US" sz="1350" dirty="0"/>
+          </a:p>
+        </p:txBody>
+      </p:sp>
+      <p:sp>
+        <p:nvSpPr>
+          <p:cNvPr id="9" name="Text 7"/>
+          <p:cNvSpPr txBox="1"/>
+          <p:nvPr/>
+        </p:nvSpPr>
+        <p:spPr>
+          <a:xfrm>
+            <a:off x="4023360" y="3017520"/>
+            <a:ext cx="320040" cy="457200"/>
           </a:xfrm>
           <a:prstGeom prst="rect">
             <a:avLst/>
@@ -8418,38 +7034,297 @@
           <a:bodyPr wrap="square" lIns="0" tIns="0" rIns="0" bIns="0" rtlCol="0" anchor="t"/>
           <a:lstStyle/>
           <a:p>
-            <a:pPr indent="0" marL="0">
-              <a:buNone/>
-            </a:pPr>
-            <a:r>
-              <a:rPr lang="en-US" sz="1200" dirty="0">
-                <a:solidFill>
-                  <a:srgbClr val="5B6472"/>
-                </a:solidFill>
-                <a:latin typeface="Meiryo" pitchFamily="34" charset="0"/>
-                <a:ea typeface="Meiryo" pitchFamily="34" charset="-122"/>
-                <a:cs typeface="Meiryo" pitchFamily="34" charset="-120"/>
-              </a:rPr>
-              <a:t>↑ 例：少し小さく、画面の下のほうに</a:t>
-            </a:r>
-            <a:endParaRPr lang="en-US" sz="1200" dirty="0"/>
-          </a:p>
-        </p:txBody>
-      </p:sp>
-      <p:sp>
-        <p:nvSpPr>
-          <p:cNvPr id="8" name="Shape 5"/>
+            <a:pPr algn="ctr" indent="0" marL="0">
+              <a:buNone/>
+            </a:pPr>
+            <a:r>
+              <a:rPr lang="en-US" sz="1800" dirty="0">
+                <a:solidFill>
+                  <a:srgbClr val="F28C28"/>
+                </a:solidFill>
+                <a:latin typeface="Meiryo" pitchFamily="34" charset="0"/>
+                <a:ea typeface="Meiryo" pitchFamily="34" charset="-122"/>
+                <a:cs typeface="Meiryo" pitchFamily="34" charset="-120"/>
+              </a:rPr>
+              <a:t>▶</a:t>
+            </a:r>
+            <a:endParaRPr lang="en-US" sz="1800" dirty="0"/>
+          </a:p>
+        </p:txBody>
+      </p:sp>
+      <p:sp>
+        <p:nvSpPr>
+          <p:cNvPr id="10" name="Shape 8"/>
           <p:cNvSpPr/>
           <p:nvPr/>
         </p:nvSpPr>
         <p:spPr>
           <a:xfrm>
-            <a:off x="548640" y="5257800"/>
-            <a:ext cx="11109960" cy="868680"/>
+            <a:off x="4389120" y="1737360"/>
+            <a:ext cx="3429000" cy="3017520"/>
           </a:xfrm>
           <a:prstGeom prst="roundRect">
             <a:avLst>
-              <a:gd name="adj" fmla="val 12632"/>
+              <a:gd name="adj" fmla="val 3636"/>
+            </a:avLst>
+          </a:prstGeom>
+          <a:solidFill>
+            <a:srgbClr val="F2F4F8"/>
+          </a:solidFill>
+          <a:ln w="12700">
+            <a:solidFill>
+              <a:srgbClr val="F2F4F8"/>
+            </a:solidFill>
+            <a:prstDash val="solid"/>
+          </a:ln>
+        </p:spPr>
+      </p:sp>
+      <p:sp>
+        <p:nvSpPr>
+          <p:cNvPr id="11" name="Shape 9"/>
+          <p:cNvSpPr/>
+          <p:nvPr/>
+        </p:nvSpPr>
+        <p:spPr>
+          <a:xfrm>
+            <a:off x="4663440" y="2011680"/>
+            <a:ext cx="548640" cy="548640"/>
+          </a:xfrm>
+          <a:prstGeom prst="ellipse">
+            <a:avLst/>
+          </a:prstGeom>
+          <a:solidFill>
+            <a:srgbClr val="F28C28"/>
+          </a:solidFill>
+          <a:ln w="12700">
+            <a:solidFill>
+              <a:srgbClr val="F28C28"/>
+            </a:solidFill>
+            <a:prstDash val="solid"/>
+          </a:ln>
+        </p:spPr>
+      </p:sp>
+      <p:sp>
+        <p:nvSpPr>
+          <p:cNvPr id="12" name="Text 10"/>
+          <p:cNvSpPr txBox="1"/>
+          <p:nvPr/>
+        </p:nvSpPr>
+        <p:spPr>
+          <a:xfrm>
+            <a:off x="4663440" y="2011680"/>
+            <a:ext cx="548640" cy="548640"/>
+          </a:xfrm>
+          <a:prstGeom prst="rect">
+            <a:avLst/>
+          </a:prstGeom>
+          <a:noFill/>
+          <a:ln/>
+        </p:spPr>
+        <p:txBody>
+          <a:bodyPr wrap="square" lIns="0" tIns="0" rIns="0" bIns="0" rtlCol="0" anchor="ctr"/>
+          <a:lstStyle/>
+          <a:p>
+            <a:pPr algn="ctr" indent="0" marL="0">
+              <a:buNone/>
+            </a:pPr>
+            <a:r>
+              <a:rPr lang="en-US" sz="2040" b="1" dirty="0">
+                <a:solidFill>
+                  <a:srgbClr val="FFFFFF"/>
+                </a:solidFill>
+                <a:latin typeface="Meiryo" pitchFamily="34" charset="0"/>
+                <a:ea typeface="Meiryo" pitchFamily="34" charset="-122"/>
+                <a:cs typeface="Meiryo" pitchFamily="34" charset="-120"/>
+              </a:rPr>
+              <a:t>2</a:t>
+            </a:r>
+            <a:endParaRPr lang="en-US" sz="2040" dirty="0"/>
+          </a:p>
+        </p:txBody>
+      </p:sp>
+      <p:sp>
+        <p:nvSpPr>
+          <p:cNvPr id="13" name="Text 11"/>
+          <p:cNvSpPr txBox="1"/>
+          <p:nvPr/>
+        </p:nvSpPr>
+        <p:spPr>
+          <a:xfrm>
+            <a:off x="5349240" y="2011680"/>
+            <a:ext cx="2331720" cy="548640"/>
+          </a:xfrm>
+          <a:prstGeom prst="rect">
+            <a:avLst/>
+          </a:prstGeom>
+          <a:noFill/>
+          <a:ln/>
+        </p:spPr>
+        <p:txBody>
+          <a:bodyPr wrap="square" lIns="0" tIns="0" rIns="0" bIns="0" rtlCol="0" anchor="ctr"/>
+          <a:lstStyle/>
+          <a:p>
+            <a:pPr indent="0" marL="0">
+              <a:buNone/>
+            </a:pPr>
+            <a:r>
+              <a:rPr lang="en-US" sz="1800" b="1" dirty="0">
+                <a:solidFill>
+                  <a:srgbClr val="1F2937"/>
+                </a:solidFill>
+                <a:latin typeface="Meiryo" pitchFamily="34" charset="0"/>
+                <a:ea typeface="Meiryo" pitchFamily="34" charset="-122"/>
+                <a:cs typeface="Meiryo" pitchFamily="34" charset="-120"/>
+              </a:rPr>
+              <a:t>見た目を整える</a:t>
+            </a:r>
+            <a:endParaRPr lang="en-US" sz="1800" dirty="0"/>
+          </a:p>
+        </p:txBody>
+      </p:sp>
+      <p:sp>
+        <p:nvSpPr>
+          <p:cNvPr id="14" name="Text 12"/>
+          <p:cNvSpPr txBox="1"/>
+          <p:nvPr/>
+        </p:nvSpPr>
+        <p:spPr>
+          <a:xfrm>
+            <a:off x="4663440" y="2788920"/>
+            <a:ext cx="2971800" cy="1828800"/>
+          </a:xfrm>
+          <a:prstGeom prst="rect">
+            <a:avLst/>
+          </a:prstGeom>
+          <a:noFill/>
+          <a:ln/>
+        </p:spPr>
+        <p:txBody>
+          <a:bodyPr wrap="square" lIns="0" tIns="0" rIns="0" bIns="0" rtlCol="0" anchor="t"/>
+          <a:lstStyle/>
+          <a:p>
+            <a:pPr indent="0" marL="0">
+              <a:buNone/>
+            </a:pPr>
+            <a:r>
+              <a:rPr lang="en-US" sz="1350" dirty="0">
+                <a:solidFill>
+                  <a:srgbClr val="1F2937"/>
+                </a:solidFill>
+                <a:latin typeface="Meiryo" pitchFamily="34" charset="0"/>
+                <a:ea typeface="Meiryo" pitchFamily="34" charset="-122"/>
+                <a:cs typeface="Meiryo" pitchFamily="34" charset="-120"/>
+              </a:rPr>
+              <a:t>インスペクタで</a:t>
+            </a:r>
+            <a:endParaRPr lang="en-US" sz="1350" dirty="0"/>
+          </a:p>
+          <a:p>
+            <a:pPr indent="0" marL="0">
+              <a:buNone/>
+            </a:pPr>
+            <a:r>
+              <a:rPr lang="en-US" sz="1350" dirty="0">
+                <a:solidFill>
+                  <a:srgbClr val="1F2937"/>
+                </a:solidFill>
+                <a:latin typeface="Meiryo" pitchFamily="34" charset="0"/>
+                <a:ea typeface="Meiryo" pitchFamily="34" charset="-122"/>
+                <a:cs typeface="Meiryo" pitchFamily="34" charset="-120"/>
+              </a:rPr>
+              <a:t>フォント・大きさ・色・</a:t>
+            </a:r>
+            <a:endParaRPr lang="en-US" sz="1350" dirty="0"/>
+          </a:p>
+          <a:p>
+            <a:pPr indent="0" marL="0">
+              <a:buNone/>
+            </a:pPr>
+            <a:r>
+              <a:rPr lang="en-US" sz="1350" dirty="0">
+                <a:solidFill>
+                  <a:srgbClr val="1F2937"/>
+                </a:solidFill>
+                <a:latin typeface="Meiryo" pitchFamily="34" charset="0"/>
+                <a:ea typeface="Meiryo" pitchFamily="34" charset="-122"/>
+                <a:cs typeface="Meiryo" pitchFamily="34" charset="-120"/>
+              </a:rPr>
+              <a:t>縁取り・位置を決める</a:t>
+            </a:r>
+            <a:endParaRPr lang="en-US" sz="1350" dirty="0"/>
+          </a:p>
+          <a:p>
+            <a:pPr indent="0" marL="0">
+              <a:buNone/>
+            </a:pPr>
+            <a:r>
+              <a:rPr lang="en-US" sz="1350" dirty="0">
+                <a:solidFill>
+                  <a:srgbClr val="1F2937"/>
+                </a:solidFill>
+                <a:latin typeface="Meiryo" pitchFamily="34" charset="0"/>
+                <a:ea typeface="Meiryo" pitchFamily="34" charset="-122"/>
+                <a:cs typeface="Meiryo" pitchFamily="34" charset="-120"/>
+              </a:rPr>
+              <a:t>（文字の中身は何でも OK）</a:t>
+            </a:r>
+            <a:endParaRPr lang="en-US" sz="1350" dirty="0"/>
+          </a:p>
+        </p:txBody>
+      </p:sp>
+      <p:sp>
+        <p:nvSpPr>
+          <p:cNvPr id="15" name="Text 13"/>
+          <p:cNvSpPr txBox="1"/>
+          <p:nvPr/>
+        </p:nvSpPr>
+        <p:spPr>
+          <a:xfrm>
+            <a:off x="7863840" y="3017520"/>
+            <a:ext cx="320040" cy="457200"/>
+          </a:xfrm>
+          <a:prstGeom prst="rect">
+            <a:avLst/>
+          </a:prstGeom>
+          <a:noFill/>
+          <a:ln/>
+        </p:spPr>
+        <p:txBody>
+          <a:bodyPr wrap="square" lIns="0" tIns="0" rIns="0" bIns="0" rtlCol="0" anchor="t"/>
+          <a:lstStyle/>
+          <a:p>
+            <a:pPr algn="ctr" indent="0" marL="0">
+              <a:buNone/>
+            </a:pPr>
+            <a:r>
+              <a:rPr lang="en-US" sz="1800" dirty="0">
+                <a:solidFill>
+                  <a:srgbClr val="F28C28"/>
+                </a:solidFill>
+                <a:latin typeface="Meiryo" pitchFamily="34" charset="0"/>
+                <a:ea typeface="Meiryo" pitchFamily="34" charset="-122"/>
+                <a:cs typeface="Meiryo" pitchFamily="34" charset="-120"/>
+              </a:rPr>
+              <a:t>▶</a:t>
+            </a:r>
+            <a:endParaRPr lang="en-US" sz="1800" dirty="0"/>
+          </a:p>
+        </p:txBody>
+      </p:sp>
+      <p:sp>
+        <p:nvSpPr>
+          <p:cNvPr id="16" name="Shape 14"/>
+          <p:cNvSpPr/>
+          <p:nvPr/>
+        </p:nvSpPr>
+        <p:spPr>
+          <a:xfrm>
+            <a:off x="8229600" y="1737360"/>
+            <a:ext cx="3429000" cy="3017520"/>
+          </a:xfrm>
+          <a:prstGeom prst="roundRect">
+            <a:avLst>
+              <a:gd name="adj" fmla="val 3636"/>
             </a:avLst>
           </a:prstGeom>
           <a:solidFill>
@@ -8465,13 +7340,282 @@
       </p:sp>
       <p:sp>
         <p:nvSpPr>
-          <p:cNvPr id="9" name="Text 6"/>
-          <p:cNvSpPr txBox="1"/>
-          <p:nvPr/>
-        </p:nvSpPr>
-        <p:spPr>
-          <a:xfrm>
-            <a:off x="731520" y="5367528"/>
+          <p:cNvPr id="17" name="Shape 15"/>
+          <p:cNvSpPr/>
+          <p:nvPr/>
+        </p:nvSpPr>
+        <p:spPr>
+          <a:xfrm>
+            <a:off x="8503920" y="2011680"/>
+            <a:ext cx="548640" cy="548640"/>
+          </a:xfrm>
+          <a:prstGeom prst="ellipse">
+            <a:avLst/>
+          </a:prstGeom>
+          <a:solidFill>
+            <a:srgbClr val="F28C28"/>
+          </a:solidFill>
+          <a:ln w="12700">
+            <a:solidFill>
+              <a:srgbClr val="F28C28"/>
+            </a:solidFill>
+            <a:prstDash val="solid"/>
+          </a:ln>
+        </p:spPr>
+      </p:sp>
+      <p:sp>
+        <p:nvSpPr>
+          <p:cNvPr id="18" name="Text 16"/>
+          <p:cNvSpPr txBox="1"/>
+          <p:nvPr/>
+        </p:nvSpPr>
+        <p:spPr>
+          <a:xfrm>
+            <a:off x="8503920" y="2011680"/>
+            <a:ext cx="548640" cy="548640"/>
+          </a:xfrm>
+          <a:prstGeom prst="rect">
+            <a:avLst/>
+          </a:prstGeom>
+          <a:noFill/>
+          <a:ln/>
+        </p:spPr>
+        <p:txBody>
+          <a:bodyPr wrap="square" lIns="0" tIns="0" rIns="0" bIns="0" rtlCol="0" anchor="ctr"/>
+          <a:lstStyle/>
+          <a:p>
+            <a:pPr algn="ctr" indent="0" marL="0">
+              <a:buNone/>
+            </a:pPr>
+            <a:r>
+              <a:rPr lang="en-US" sz="2040" b="1" dirty="0">
+                <a:solidFill>
+                  <a:srgbClr val="FFFFFF"/>
+                </a:solidFill>
+                <a:latin typeface="Meiryo" pitchFamily="34" charset="0"/>
+                <a:ea typeface="Meiryo" pitchFamily="34" charset="-122"/>
+                <a:cs typeface="Meiryo" pitchFamily="34" charset="-120"/>
+              </a:rPr>
+              <a:t>3</a:t>
+            </a:r>
+            <a:endParaRPr lang="en-US" sz="2040" dirty="0"/>
+          </a:p>
+        </p:txBody>
+      </p:sp>
+      <p:sp>
+        <p:nvSpPr>
+          <p:cNvPr id="19" name="Text 17"/>
+          <p:cNvSpPr txBox="1"/>
+          <p:nvPr/>
+        </p:nvSpPr>
+        <p:spPr>
+          <a:xfrm>
+            <a:off x="9189720" y="2011680"/>
+            <a:ext cx="2331720" cy="548640"/>
+          </a:xfrm>
+          <a:prstGeom prst="rect">
+            <a:avLst/>
+          </a:prstGeom>
+          <a:noFill/>
+          <a:ln/>
+        </p:spPr>
+        <p:txBody>
+          <a:bodyPr wrap="square" lIns="0" tIns="0" rIns="0" bIns="0" rtlCol="0" anchor="ctr"/>
+          <a:lstStyle/>
+          <a:p>
+            <a:pPr indent="0" marL="0">
+              <a:buNone/>
+            </a:pPr>
+            <a:r>
+              <a:rPr lang="en-US" sz="1800" b="1" dirty="0">
+                <a:solidFill>
+                  <a:srgbClr val="1F2937"/>
+                </a:solidFill>
+                <a:latin typeface="Meiryo" pitchFamily="34" charset="0"/>
+                <a:ea typeface="Meiryo" pitchFamily="34" charset="-122"/>
+                <a:cs typeface="Meiryo" pitchFamily="34" charset="-120"/>
+              </a:rPr>
+              <a:t>メディアプールへ</a:t>
+            </a:r>
+            <a:endParaRPr lang="en-US" sz="1800" dirty="0"/>
+          </a:p>
+        </p:txBody>
+      </p:sp>
+      <p:sp>
+        <p:nvSpPr>
+          <p:cNvPr id="20" name="Text 18"/>
+          <p:cNvSpPr txBox="1"/>
+          <p:nvPr/>
+        </p:nvSpPr>
+        <p:spPr>
+          <a:xfrm>
+            <a:off x="8503920" y="2788920"/>
+            <a:ext cx="2971800" cy="1828800"/>
+          </a:xfrm>
+          <a:prstGeom prst="rect">
+            <a:avLst/>
+          </a:prstGeom>
+          <a:noFill/>
+          <a:ln/>
+        </p:spPr>
+        <p:txBody>
+          <a:bodyPr wrap="square" lIns="0" tIns="0" rIns="0" bIns="0" rtlCol="0" anchor="t"/>
+          <a:lstStyle/>
+          <a:p>
+            <a:pPr indent="0" marL="0">
+              <a:buNone/>
+            </a:pPr>
+            <a:r>
+              <a:rPr lang="en-US" sz="1350" dirty="0">
+                <a:solidFill>
+                  <a:srgbClr val="1F2937"/>
+                </a:solidFill>
+                <a:latin typeface="Meiryo" pitchFamily="34" charset="0"/>
+                <a:ea typeface="Meiryo" pitchFamily="34" charset="-122"/>
+                <a:cs typeface="Meiryo" pitchFamily="34" charset="-120"/>
+              </a:rPr>
+              <a:t>そのクリップを</a:t>
+            </a:r>
+            <a:endParaRPr lang="en-US" sz="1350" dirty="0"/>
+          </a:p>
+          <a:p>
+            <a:pPr indent="0" marL="0">
+              <a:buNone/>
+            </a:pPr>
+            <a:r>
+              <a:rPr lang="en-US" sz="1350" dirty="0">
+                <a:solidFill>
+                  <a:srgbClr val="1F2937"/>
+                </a:solidFill>
+                <a:latin typeface="Meiryo" pitchFamily="34" charset="0"/>
+                <a:ea typeface="Meiryo" pitchFamily="34" charset="-122"/>
+                <a:cs typeface="Meiryo" pitchFamily="34" charset="-120"/>
+              </a:rPr>
+              <a:t>メディアプールへドラッグし、</a:t>
+            </a:r>
+            <a:endParaRPr lang="en-US" sz="1350" dirty="0"/>
+          </a:p>
+          <a:p>
+            <a:pPr indent="0" marL="0">
+              <a:buNone/>
+            </a:pPr>
+            <a:r>
+              <a:rPr lang="en-US" sz="1350" dirty="0">
+                <a:solidFill>
+                  <a:srgbClr val="1F2937"/>
+                </a:solidFill>
+                <a:latin typeface="Meiryo" pitchFamily="34" charset="0"/>
+                <a:ea typeface="Meiryo" pitchFamily="34" charset="-122"/>
+                <a:cs typeface="Meiryo" pitchFamily="34" charset="-120"/>
+              </a:rPr>
+              <a:t>名前を「テロップ」に変える</a:t>
+            </a:r>
+            <a:endParaRPr lang="en-US" sz="1350" dirty="0"/>
+          </a:p>
+        </p:txBody>
+      </p:sp>
+      <p:sp>
+        <p:nvSpPr>
+          <p:cNvPr id="21" name="Shape 19"/>
+          <p:cNvSpPr/>
+          <p:nvPr/>
+        </p:nvSpPr>
+        <p:spPr>
+          <a:xfrm>
+            <a:off x="8275320" y="3977640"/>
+            <a:ext cx="1371600" cy="566928"/>
+          </a:xfrm>
+          <a:prstGeom prst="roundRect">
+            <a:avLst>
+              <a:gd name="adj" fmla="val 9677"/>
+            </a:avLst>
+          </a:prstGeom>
+          <a:solidFill>
+            <a:srgbClr val="7C3AED"/>
+          </a:solidFill>
+          <a:ln w="12700">
+            <a:solidFill>
+              <a:srgbClr val="7C3AED"/>
+            </a:solidFill>
+            <a:prstDash val="solid"/>
+          </a:ln>
+        </p:spPr>
+      </p:sp>
+      <p:sp>
+        <p:nvSpPr>
+          <p:cNvPr id="22" name="Text 20"/>
+          <p:cNvSpPr txBox="1"/>
+          <p:nvPr/>
+        </p:nvSpPr>
+        <p:spPr>
+          <a:xfrm>
+            <a:off x="8275320" y="3977640"/>
+            <a:ext cx="1371600" cy="566928"/>
+          </a:xfrm>
+          <a:prstGeom prst="rect">
+            <a:avLst/>
+          </a:prstGeom>
+          <a:noFill/>
+          <a:ln/>
+        </p:spPr>
+        <p:txBody>
+          <a:bodyPr wrap="square" lIns="0" tIns="0" rIns="0" bIns="0" rtlCol="0" anchor="ctr"/>
+          <a:lstStyle/>
+          <a:p>
+            <a:pPr algn="ctr" indent="0" marL="0">
+              <a:buNone/>
+            </a:pPr>
+            <a:r>
+              <a:rPr lang="en-US" sz="1300" b="1" dirty="0">
+                <a:solidFill>
+                  <a:srgbClr val="FFFFFF"/>
+                </a:solidFill>
+                <a:latin typeface="Meiryo" pitchFamily="34" charset="0"/>
+                <a:ea typeface="Meiryo" pitchFamily="34" charset="-122"/>
+                <a:cs typeface="Meiryo" pitchFamily="34" charset="-120"/>
+              </a:rPr>
+              <a:t>T+  テロップ</a:t>
+            </a:r>
+            <a:endParaRPr lang="en-US" sz="1300" dirty="0"/>
+          </a:p>
+        </p:txBody>
+      </p:sp>
+      <p:sp>
+        <p:nvSpPr>
+          <p:cNvPr id="23" name="Shape 21"/>
+          <p:cNvSpPr/>
+          <p:nvPr/>
+        </p:nvSpPr>
+        <p:spPr>
+          <a:xfrm>
+            <a:off x="548640" y="5074920"/>
+            <a:ext cx="11109960" cy="868680"/>
+          </a:xfrm>
+          <a:prstGeom prst="roundRect">
+            <a:avLst>
+              <a:gd name="adj" fmla="val 12632"/>
+            </a:avLst>
+          </a:prstGeom>
+          <a:solidFill>
+            <a:srgbClr val="FDEBD7"/>
+          </a:solidFill>
+          <a:ln w="12700">
+            <a:solidFill>
+              <a:srgbClr val="FDEBD7"/>
+            </a:solidFill>
+            <a:prstDash val="solid"/>
+          </a:ln>
+        </p:spPr>
+      </p:sp>
+      <p:sp>
+        <p:nvSpPr>
+          <p:cNvPr id="24" name="Text 22"/>
+          <p:cNvSpPr txBox="1"/>
+          <p:nvPr/>
+        </p:nvSpPr>
+        <p:spPr>
+          <a:xfrm>
+            <a:off x="731520" y="5184648"/>
             <a:ext cx="10744200" cy="649224"/>
           </a:xfrm>
           <a:prstGeom prst="rect">
@@ -8496,9 +7640,48 @@
                 <a:ea typeface="Meiryo" pitchFamily="34" charset="-122"/>
                 <a:cs typeface="Meiryo" pitchFamily="34" charset="-120"/>
               </a:rPr>
-              <a:t>数字を変えて再スタートすると、新しい見た目のテロップが作られます。わからなければ「もう少し小さく」などと Claude に頼んでも OK</a:t>
+              <a:t>プロジェクトごとに1回だけ。ひな形がないとテロップは置かれず、レポートに警告が出ます（ほかは普通に並びます）。見た目を変えたいときは、ひな形を直して再スタート</a:t>
             </a:r>
             <a:endParaRPr lang="en-US" sz="1300" dirty="0"/>
+          </a:p>
+        </p:txBody>
+      </p:sp>
+      <p:sp>
+        <p:nvSpPr>
+          <p:cNvPr id="25" name="Text 23"/>
+          <p:cNvSpPr txBox="1"/>
+          <p:nvPr/>
+        </p:nvSpPr>
+        <p:spPr>
+          <a:xfrm>
+            <a:off x="548640" y="6126480"/>
+            <a:ext cx="11109960" cy="365760"/>
+          </a:xfrm>
+          <a:prstGeom prst="rect">
+            <a:avLst/>
+          </a:prstGeom>
+          <a:noFill/>
+          <a:ln/>
+        </p:spPr>
+        <p:txBody>
+          <a:bodyPr wrap="square" lIns="0" tIns="0" rIns="0" bIns="0" rtlCol="0" anchor="t"/>
+          <a:lstStyle/>
+          <a:p>
+            <a:pPr indent="0" marL="0">
+              <a:buNone/>
+            </a:pPr>
+            <a:r>
+              <a:rPr lang="en-US" sz="1250" dirty="0">
+                <a:solidFill>
+                  <a:srgbClr val="5B6472"/>
+                </a:solidFill>
+                <a:latin typeface="Meiryo" pitchFamily="34" charset="0"/>
+                <a:ea typeface="Meiryo" pitchFamily="34" charset="-122"/>
+                <a:cs typeface="Meiryo" pitchFamily="34" charset="-120"/>
+              </a:rPr>
+              <a:t>置かれたテロップは、クリックしてインスペクタの「テキスト」で文字を直せます</a:t>
+            </a:r>
+            <a:endParaRPr lang="en-US" sz="1250" dirty="0"/>
           </a:p>
         </p:txBody>
       </p:sp>
@@ -9586,7 +8769,7 @@
                           <a:ea typeface="Meiryo" pitchFamily="34" charset="-122"/>
                           <a:cs typeface="Meiryo" pitchFamily="34" charset="-120"/>
                         </a:rPr>
-                        <a:t>テロップを作るには Pillow が必要です</a:t>
+                        <a:t>テロップのひな形「テロップ」がメディアプールにない</a:t>
                       </a:r>
                       <a:endParaRPr lang="en-US" sz="1200" dirty="0">
                         <a:latin typeface="Meiryo" charset="0"/>
@@ -9651,7 +8834,7 @@
                           <a:ea typeface="Meiryo" pitchFamily="34" charset="-122"/>
                           <a:cs typeface="Meiryo" pitchFamily="34" charset="-120"/>
                         </a:rPr>
-                        <a:t>p.4 の準備（pip install）をもう一度</a:t>
+                        <a:t>p.14 のひな形を作ってから、もう一度スタート</a:t>
                       </a:r>
                       <a:endParaRPr lang="en-US" sz="1200" dirty="0">
                         <a:latin typeface="Meiryo" charset="0"/>
@@ -11818,7 +11001,7 @@
                 <a:ea typeface="Meiryo" pitchFamily="34" charset="-122"/>
                 <a:cs typeface="Meiryo" pitchFamily="34" charset="-120"/>
               </a:rPr>
-              <a:t>テロップを作って V2 に置く</a:t>
+              <a:t>テロップを Text+ で V2 に置く（直せる）</a:t>
             </a:r>
             <a:endParaRPr lang="en-US" sz="1300" dirty="0"/>
           </a:p>

--- a/取扱説明書.pptx
+++ b/取扱説明書.pptx
@@ -3350,7 +3350,7 @@
                 <a:ea typeface="Meiryo" pitchFamily="34" charset="-122"/>
                 <a:cs typeface="Meiryo" pitchFamily="34" charset="-120"/>
               </a:rPr>
-              <a:t>ナレーションは必須。BGM はなくても OK</a:t>
+              <a:t>どちらもなくても OK（なしなら動画の長さ・動画の音声で並ぶ）</a:t>
             </a:r>
             <a:endParaRPr lang="en-US" sz="1200" dirty="0"/>
           </a:p>
@@ -7956,138 +7956,6 @@
                     <a:solidFill>
                       <a:srgbClr val="161B26"/>
                     </a:solidFill>
-                  </a:tcPr>
-                </a:tc>
-              </a:tr>
-              <a:tr h="512064">
-                <a:tc>
-                  <a:txBody>
-                    <a:bodyPr/>
-                    <a:lstStyle/>
-                    <a:p>
-                      <a:pPr indent="0" marL="0">
-                        <a:buNone/>
-                      </a:pPr>
-                      <a:r>
-                        <a:rPr lang="en-US" sz="1200" dirty="0">
-                          <a:solidFill>
-                            <a:srgbClr val="1F2937"/>
-                          </a:solidFill>
-                          <a:latin typeface="Meiryo" pitchFamily="34" charset="0"/>
-                          <a:ea typeface="Meiryo" pitchFamily="34" charset="-122"/>
-                          <a:cs typeface="Meiryo" pitchFamily="34" charset="-120"/>
-                        </a:rPr>
-                        <a:t>ナレーションの音声ファイルを選んでください</a:t>
-                      </a:r>
-                      <a:endParaRPr lang="en-US" sz="1200" dirty="0">
-                        <a:latin typeface="Meiryo" charset="0"/>
-                        <a:ea typeface="Meiryo" charset="0"/>
-                        <a:cs typeface="Meiryo" charset="0"/>
-                      </a:endParaRPr>
-                    </a:p>
-                  </a:txBody>
-                  <a:tcPr marL="91440" marR="91440" marT="45720" marB="45720" anchor="ctr">
-                    <a:lnL w="12700" cap="flat" cmpd="sng" algn="ctr">
-                      <a:solidFill>
-                        <a:srgbClr val="D5DAE3"/>
-                      </a:solidFill>
-                      <a:prstDash val="solid"/>
-                      <a:round/>
-                      <a:headEnd type="none" w="med" len="med"/>
-                      <a:tailEnd type="none" w="med" len="med"/>
-                    </a:lnL>
-                    <a:lnR w="12700" cap="flat" cmpd="sng" algn="ctr">
-                      <a:solidFill>
-                        <a:srgbClr val="D5DAE3"/>
-                      </a:solidFill>
-                      <a:prstDash val="solid"/>
-                      <a:round/>
-                      <a:headEnd type="none" w="med" len="med"/>
-                      <a:tailEnd type="none" w="med" len="med"/>
-                    </a:lnR>
-                    <a:lnT w="12700" cap="flat" cmpd="sng" algn="ctr">
-                      <a:solidFill>
-                        <a:srgbClr val="D5DAE3"/>
-                      </a:solidFill>
-                      <a:prstDash val="solid"/>
-                      <a:round/>
-                      <a:headEnd type="none" w="med" len="med"/>
-                      <a:tailEnd type="none" w="med" len="med"/>
-                    </a:lnT>
-                    <a:lnB w="12700" cap="flat" cmpd="sng" algn="ctr">
-                      <a:solidFill>
-                        <a:srgbClr val="D5DAE3"/>
-                      </a:solidFill>
-                      <a:prstDash val="solid"/>
-                      <a:round/>
-                      <a:headEnd type="none" w="med" len="med"/>
-                      <a:tailEnd type="none" w="med" len="med"/>
-                    </a:lnB>
-                  </a:tcPr>
-                </a:tc>
-                <a:tc>
-                  <a:txBody>
-                    <a:bodyPr/>
-                    <a:lstStyle/>
-                    <a:p>
-                      <a:pPr indent="0" marL="0">
-                        <a:buNone/>
-                      </a:pPr>
-                      <a:r>
-                        <a:rPr lang="en-US" sz="1200" dirty="0">
-                          <a:solidFill>
-                            <a:srgbClr val="1F2937"/>
-                          </a:solidFill>
-                          <a:latin typeface="Meiryo" pitchFamily="34" charset="0"/>
-                          <a:ea typeface="Meiryo" pitchFamily="34" charset="-122"/>
-                          <a:cs typeface="Meiryo" pitchFamily="34" charset="-120"/>
-                        </a:rPr>
-                        <a:t>③ でナレーションを選ぶ</a:t>
-                      </a:r>
-                      <a:endParaRPr lang="en-US" sz="1200" dirty="0">
-                        <a:latin typeface="Meiryo" charset="0"/>
-                        <a:ea typeface="Meiryo" charset="0"/>
-                        <a:cs typeface="Meiryo" charset="0"/>
-                      </a:endParaRPr>
-                    </a:p>
-                  </a:txBody>
-                  <a:tcPr marL="91440" marR="91440" marT="45720" marB="45720" anchor="ctr">
-                    <a:lnL w="12700" cap="flat" cmpd="sng" algn="ctr">
-                      <a:solidFill>
-                        <a:srgbClr val="D5DAE3"/>
-                      </a:solidFill>
-                      <a:prstDash val="solid"/>
-                      <a:round/>
-                      <a:headEnd type="none" w="med" len="med"/>
-                      <a:tailEnd type="none" w="med" len="med"/>
-                    </a:lnL>
-                    <a:lnR w="12700" cap="flat" cmpd="sng" algn="ctr">
-                      <a:solidFill>
-                        <a:srgbClr val="D5DAE3"/>
-                      </a:solidFill>
-                      <a:prstDash val="solid"/>
-                      <a:round/>
-                      <a:headEnd type="none" w="med" len="med"/>
-                      <a:tailEnd type="none" w="med" len="med"/>
-                    </a:lnR>
-                    <a:lnT w="12700" cap="flat" cmpd="sng" algn="ctr">
-                      <a:solidFill>
-                        <a:srgbClr val="D5DAE3"/>
-                      </a:solidFill>
-                      <a:prstDash val="solid"/>
-                      <a:round/>
-                      <a:headEnd type="none" w="med" len="med"/>
-                      <a:tailEnd type="none" w="med" len="med"/>
-                    </a:lnT>
-                    <a:lnB w="12700" cap="flat" cmpd="sng" algn="ctr">
-                      <a:solidFill>
-                        <a:srgbClr val="D5DAE3"/>
-                      </a:solidFill>
-                      <a:prstDash val="solid"/>
-                      <a:round/>
-                      <a:headEnd type="none" w="med" len="med"/>
-                      <a:tailEnd type="none" w="med" len="med"/>
-                    </a:lnB>
                   </a:tcPr>
                 </a:tc>
               </a:tr>
